--- a/Seminario de Sistemas/Clases/Clase 1 - Conceptos iniciales/Presentacion.pptx
+++ b/Seminario de Sistemas/Clases/Clase 1 - Conceptos iniciales/Presentacion.pptx
@@ -16,6 +16,9 @@
     <p:sldId id="264" r:id="rId15"/>
     <p:sldId id="265" r:id="rId16"/>
     <p:sldId id="266" r:id="rId17"/>
+    <p:sldId id="267" r:id="rId18"/>
+    <p:sldId id="268" r:id="rId19"/>
+    <p:sldId id="269" r:id="rId20"/>
   </p:sldIdLst>
   <p:sldSz cx="12191695" cy="6858000" type="screen4x3"/>
   <p:notesSz cx="6858000" cy="9144000"/>
@@ -3616,7 +3619,7 @@
                 </a:solidFill>
                 <a:latin typeface="Calibri"/>
               </a:rPr>
-              <a:t>Criterio de exito del taller</a:t>
+              <a:t>Taller PI — pasos guiados</a:t>
             </a:r>
           </a:p>
         </p:txBody>
@@ -3629,8 +3632,163 @@
         </p:nvSpPr>
         <p:spPr>
           <a:xfrm>
-            <a:off x="457200" y="1261872"/>
-            <a:ext cx="11277295" cy="1051560"/>
+            <a:off x="457200" y="1234440"/>
+            <a:ext cx="11277295" cy="777240"/>
+          </a:xfrm>
+          <a:prstGeom prst="roundRect">
+            <a:avLst>
+              <a:gd name="adj" fmla="val 12000"/>
+            </a:avLst>
+          </a:prstGeom>
+          <a:solidFill>
+            <a:srgbClr val="F2F2F2"/>
+          </a:solidFill>
+          <a:ln>
+            <a:noFill/>
+          </a:ln>
+        </p:spPr>
+        <p:style>
+          <a:lnRef idx="1">
+            <a:schemeClr val="accent1"/>
+          </a:lnRef>
+          <a:fillRef idx="3">
+            <a:schemeClr val="accent1"/>
+          </a:fillRef>
+          <a:effectRef idx="2">
+            <a:schemeClr val="accent1"/>
+          </a:effectRef>
+          <a:fontRef idx="minor">
+            <a:schemeClr val="lt1"/>
+          </a:fontRef>
+        </p:style>
+        <p:txBody>
+          <a:bodyPr rtlCol="0" anchor="ctr"/>
+          <a:lstStyle/>
+          <a:p>
+            <a:pPr algn="ctr"/>
+          </a:p>
+        </p:txBody>
+      </p:sp>
+      <p:sp>
+        <p:nvSpPr>
+          <p:cNvPr id="6" name="Rounded Rectangle 5"/>
+          <p:cNvSpPr/>
+          <p:nvPr/>
+        </p:nvSpPr>
+        <p:spPr>
+          <a:xfrm>
+            <a:off x="594360" y="1403604"/>
+            <a:ext cx="438912" cy="438912"/>
+          </a:xfrm>
+          <a:prstGeom prst="roundRect">
+            <a:avLst>
+              <a:gd name="adj" fmla="val 12000"/>
+            </a:avLst>
+          </a:prstGeom>
+          <a:solidFill>
+            <a:srgbClr val="095292"/>
+          </a:solidFill>
+          <a:ln>
+            <a:noFill/>
+          </a:ln>
+        </p:spPr>
+        <p:style>
+          <a:lnRef idx="1">
+            <a:schemeClr val="accent1"/>
+          </a:lnRef>
+          <a:fillRef idx="3">
+            <a:schemeClr val="accent1"/>
+          </a:fillRef>
+          <a:effectRef idx="2">
+            <a:schemeClr val="accent1"/>
+          </a:effectRef>
+          <a:fontRef idx="minor">
+            <a:schemeClr val="lt1"/>
+          </a:fontRef>
+        </p:style>
+        <p:txBody>
+          <a:bodyPr rtlCol="0" anchor="ctr"/>
+          <a:lstStyle/>
+          <a:p>
+            <a:pPr algn="ctr"/>
+          </a:p>
+        </p:txBody>
+      </p:sp>
+      <p:sp>
+        <p:nvSpPr>
+          <p:cNvPr id="7" name="TextBox 6"/>
+          <p:cNvSpPr txBox="1"/>
+          <p:nvPr/>
+        </p:nvSpPr>
+        <p:spPr>
+          <a:xfrm>
+            <a:off x="594360" y="1403604"/>
+            <a:ext cx="438912" cy="438912"/>
+          </a:xfrm>
+          <a:prstGeom prst="rect">
+            <a:avLst/>
+          </a:prstGeom>
+          <a:noFill/>
+        </p:spPr>
+        <p:txBody>
+          <a:bodyPr wrap="square" anchor="ctr"/>
+          <a:lstStyle/>
+          <a:p>
+            <a:pPr algn="ctr"/>
+            <a:r>
+              <a:rPr sz="1600" b="1" i="0">
+                <a:solidFill>
+                  <a:srgbClr val="FFFFFF"/>
+                </a:solidFill>
+                <a:latin typeface="Calibri"/>
+              </a:rPr>
+              <a:t>1</a:t>
+            </a:r>
+          </a:p>
+        </p:txBody>
+      </p:sp>
+      <p:sp>
+        <p:nvSpPr>
+          <p:cNvPr id="8" name="TextBox 7"/>
+          <p:cNvSpPr txBox="1"/>
+          <p:nvPr/>
+        </p:nvSpPr>
+        <p:spPr>
+          <a:xfrm>
+            <a:off x="1188720" y="1325880"/>
+            <a:ext cx="10271455" cy="612647"/>
+          </a:xfrm>
+          <a:prstGeom prst="rect">
+            <a:avLst/>
+          </a:prstGeom>
+          <a:noFill/>
+        </p:spPr>
+        <p:txBody>
+          <a:bodyPr wrap="square" anchor="ctr"/>
+          <a:lstStyle/>
+          <a:p>
+            <a:r>
+              <a:rPr sz="1500" b="1" i="0">
+                <a:solidFill>
+                  <a:srgbClr val="095292"/>
+                </a:solidFill>
+                <a:latin typeface="Calibri"/>
+              </a:rPr>
+              <a:t>Formen equipo de 2-3 personas y definan quien sera el vocero tecnico del grupo ante el docente.</a:t>
+            </a:r>
+          </a:p>
+        </p:txBody>
+      </p:sp>
+      <p:sp>
+        <p:nvSpPr>
+          <p:cNvPr id="9" name="Rounded Rectangle 8"/>
+          <p:cNvSpPr/>
+          <p:nvPr/>
+        </p:nvSpPr>
+        <p:spPr>
+          <a:xfrm>
+            <a:off x="457200" y="2103120"/>
+            <a:ext cx="11277295" cy="777240"/>
           </a:xfrm>
           <a:prstGeom prst="roundRect">
             <a:avLst>
@@ -3668,20 +3826,22 @@
       </p:sp>
       <p:sp>
         <p:nvSpPr>
-          <p:cNvPr id="6" name="Rectangle 5"/>
+          <p:cNvPr id="10" name="Rounded Rectangle 9"/>
           <p:cNvSpPr/>
           <p:nvPr/>
         </p:nvSpPr>
         <p:spPr>
           <a:xfrm>
-            <a:off x="457200" y="1261872"/>
-            <a:ext cx="128016" cy="1051560"/>
-          </a:xfrm>
-          <a:prstGeom prst="rect">
-            <a:avLst/>
+            <a:off x="594360" y="2272284"/>
+            <a:ext cx="438912" cy="438912"/>
+          </a:xfrm>
+          <a:prstGeom prst="roundRect">
+            <a:avLst>
+              <a:gd name="adj" fmla="val 12000"/>
+            </a:avLst>
           </a:prstGeom>
           <a:solidFill>
-            <a:srgbClr val="269CCB"/>
+            <a:srgbClr val="095292"/>
           </a:solidFill>
           <a:ln>
             <a:noFill/>
@@ -3711,14 +3871,14 @@
       </p:sp>
       <p:sp>
         <p:nvSpPr>
-          <p:cNvPr id="7" name="TextBox 6"/>
+          <p:cNvPr id="11" name="TextBox 10"/>
           <p:cNvSpPr txBox="1"/>
           <p:nvPr/>
         </p:nvSpPr>
         <p:spPr>
           <a:xfrm>
-            <a:off x="777240" y="1399031"/>
-            <a:ext cx="10774375" cy="822959"/>
+            <a:off x="594360" y="2272284"/>
+            <a:ext cx="438912" cy="438912"/>
           </a:xfrm>
           <a:prstGeom prst="rect">
             <a:avLst/>
@@ -3726,49 +3886,64 @@
           <a:noFill/>
         </p:spPr>
         <p:txBody>
-          <a:bodyPr wrap="square">
-            <a:spAutoFit/>
-          </a:bodyPr>
-          <a:lstStyle/>
-          <a:p>
-            <a:r>
-              <a:rPr sz="1200" b="1" i="0">
-                <a:solidFill>
-                  <a:srgbClr val="269CCB"/>
-                </a:solidFill>
-                <a:latin typeface="Calibri"/>
-              </a:rPr>
-              <a:t>Info</a:t>
-            </a:r>
-          </a:p>
-          <a:p>
-            <a:pPr>
-              <a:spcBef>
-                <a:spcPts val="400"/>
-              </a:spcBef>
-            </a:pPr>
-            <a:r>
-              <a:rPr sz="1400" b="0" i="0">
-                <a:solidFill>
-                  <a:srgbClr val="333333"/>
-                </a:solidFill>
-                <a:latin typeface="Calibri"/>
-              </a:rPr>
-              <a:t>El dominio es concreto: se entiende en 30 segundos sin que ustedes lo expliquen.</a:t>
-            </a:r>
-          </a:p>
-        </p:txBody>
-      </p:sp>
-      <p:sp>
-        <p:nvSpPr>
-          <p:cNvPr id="8" name="Rounded Rectangle 7"/>
+          <a:bodyPr wrap="square" anchor="ctr"/>
+          <a:lstStyle/>
+          <a:p>
+            <a:pPr algn="ctr"/>
+            <a:r>
+              <a:rPr sz="1600" b="1" i="0">
+                <a:solidFill>
+                  <a:srgbClr val="FFFFFF"/>
+                </a:solidFill>
+                <a:latin typeface="Calibri"/>
+              </a:rPr>
+              <a:t>2</a:t>
+            </a:r>
+          </a:p>
+        </p:txBody>
+      </p:sp>
+      <p:sp>
+        <p:nvSpPr>
+          <p:cNvPr id="12" name="TextBox 11"/>
+          <p:cNvSpPr txBox="1"/>
+          <p:nvPr/>
+        </p:nvSpPr>
+        <p:spPr>
+          <a:xfrm>
+            <a:off x="1188720" y="2194560"/>
+            <a:ext cx="10271455" cy="612647"/>
+          </a:xfrm>
+          <a:prstGeom prst="rect">
+            <a:avLst/>
+          </a:prstGeom>
+          <a:noFill/>
+        </p:spPr>
+        <p:txBody>
+          <a:bodyPr wrap="square" anchor="ctr"/>
+          <a:lstStyle/>
+          <a:p>
+            <a:r>
+              <a:rPr sz="1500" b="1" i="0">
+                <a:solidFill>
+                  <a:srgbClr val="095292"/>
+                </a:solidFill>
+                <a:latin typeface="Calibri"/>
+              </a:rPr>
+              <a:t>Escriban el problema en 2-3 frases: quien sufre que, y como se nota hoy ese dolor en la operacion diaria de la clinica.</a:t>
+            </a:r>
+          </a:p>
+        </p:txBody>
+      </p:sp>
+      <p:sp>
+        <p:nvSpPr>
+          <p:cNvPr id="13" name="Rounded Rectangle 12"/>
           <p:cNvSpPr/>
           <p:nvPr/>
         </p:nvSpPr>
         <p:spPr>
           <a:xfrm>
-            <a:off x="457200" y="2478024"/>
-            <a:ext cx="11277295" cy="1051560"/>
+            <a:off x="457200" y="2971800"/>
+            <a:ext cx="11277295" cy="777240"/>
           </a:xfrm>
           <a:prstGeom prst="roundRect">
             <a:avLst>
@@ -3776,7 +3951,7 @@
             </a:avLst>
           </a:prstGeom>
           <a:solidFill>
-            <a:srgbClr val="FFF8E1"/>
+            <a:srgbClr val="F2F2F2"/>
           </a:solidFill>
           <a:ln>
             <a:noFill/>
@@ -3806,20 +3981,22 @@
       </p:sp>
       <p:sp>
         <p:nvSpPr>
-          <p:cNvPr id="9" name="Rectangle 8"/>
+          <p:cNvPr id="14" name="Rounded Rectangle 13"/>
           <p:cNvSpPr/>
           <p:nvPr/>
         </p:nvSpPr>
         <p:spPr>
           <a:xfrm>
-            <a:off x="457200" y="2478024"/>
-            <a:ext cx="128016" cy="1051560"/>
-          </a:xfrm>
-          <a:prstGeom prst="rect">
-            <a:avLst/>
+            <a:off x="594360" y="3140964"/>
+            <a:ext cx="438912" cy="438912"/>
+          </a:xfrm>
+          <a:prstGeom prst="roundRect">
+            <a:avLst>
+              <a:gd name="adj" fmla="val 12000"/>
+            </a:avLst>
           </a:prstGeom>
           <a:solidFill>
-            <a:srgbClr val="FFD000"/>
+            <a:srgbClr val="095292"/>
           </a:solidFill>
           <a:ln>
             <a:noFill/>
@@ -3849,14 +4026,14 @@
       </p:sp>
       <p:sp>
         <p:nvSpPr>
-          <p:cNvPr id="10" name="TextBox 9"/>
+          <p:cNvPr id="15" name="TextBox 14"/>
           <p:cNvSpPr txBox="1"/>
           <p:nvPr/>
         </p:nvSpPr>
         <p:spPr>
           <a:xfrm>
-            <a:off x="777240" y="2615184"/>
-            <a:ext cx="10774375" cy="822959"/>
+            <a:off x="594360" y="3140964"/>
+            <a:ext cx="438912" cy="438912"/>
           </a:xfrm>
           <a:prstGeom prst="rect">
             <a:avLst/>
@@ -3864,49 +4041,64 @@
           <a:noFill/>
         </p:spPr>
         <p:txBody>
-          <a:bodyPr wrap="square">
-            <a:spAutoFit/>
-          </a:bodyPr>
-          <a:lstStyle/>
-          <a:p>
-            <a:r>
-              <a:rPr sz="1200" b="1" i="0">
-                <a:solidFill>
-                  <a:srgbClr val="FFD000"/>
-                </a:solidFill>
-                <a:latin typeface="Calibri"/>
-              </a:rPr>
-              <a:t>Aclaración</a:t>
-            </a:r>
-          </a:p>
-          <a:p>
-            <a:pPr>
-              <a:spcBef>
-                <a:spcPts val="400"/>
-              </a:spcBef>
-            </a:pPr>
-            <a:r>
-              <a:rPr sz="1400" b="0" i="0">
-                <a:solidFill>
-                  <a:srgbClr val="333333"/>
-                </a:solidFill>
-                <a:latin typeface="Calibri"/>
-              </a:rPr>
-              <a:t>Hay un actor con un dolor medible, no «usuarios» en abstracto.</a:t>
-            </a:r>
-          </a:p>
-        </p:txBody>
-      </p:sp>
-      <p:sp>
-        <p:nvSpPr>
-          <p:cNvPr id="11" name="Rounded Rectangle 10"/>
+          <a:bodyPr wrap="square" anchor="ctr"/>
+          <a:lstStyle/>
+          <a:p>
+            <a:pPr algn="ctr"/>
+            <a:r>
+              <a:rPr sz="1600" b="1" i="0">
+                <a:solidFill>
+                  <a:srgbClr val="FFFFFF"/>
+                </a:solidFill>
+                <a:latin typeface="Calibri"/>
+              </a:rPr>
+              <a:t>3</a:t>
+            </a:r>
+          </a:p>
+        </p:txBody>
+      </p:sp>
+      <p:sp>
+        <p:nvSpPr>
+          <p:cNvPr id="16" name="TextBox 15"/>
+          <p:cNvSpPr txBox="1"/>
+          <p:nvPr/>
+        </p:nvSpPr>
+        <p:spPr>
+          <a:xfrm>
+            <a:off x="1188720" y="3063240"/>
+            <a:ext cx="10271455" cy="612647"/>
+          </a:xfrm>
+          <a:prstGeom prst="rect">
+            <a:avLst/>
+          </a:prstGeom>
+          <a:noFill/>
+        </p:spPr>
+        <p:txBody>
+          <a:bodyPr wrap="square" anchor="ctr"/>
+          <a:lstStyle/>
+          <a:p>
+            <a:r>
+              <a:rPr sz="1500" b="1" i="0">
+                <a:solidFill>
+                  <a:srgbClr val="095292"/>
+                </a:solidFill>
+                <a:latin typeface="Calibri"/>
+              </a:rPr>
+              <a:t>Listen 3-5 capacidades del sistema, escritas como verbos de negocio (registrar, agendar, consultar), no como pantallas.</a:t>
+            </a:r>
+          </a:p>
+        </p:txBody>
+      </p:sp>
+      <p:sp>
+        <p:nvSpPr>
+          <p:cNvPr id="17" name="Rounded Rectangle 16"/>
           <p:cNvSpPr/>
           <p:nvPr/>
         </p:nvSpPr>
         <p:spPr>
           <a:xfrm>
-            <a:off x="457200" y="3694176"/>
-            <a:ext cx="11277295" cy="1051560"/>
+            <a:off x="457200" y="3840479"/>
+            <a:ext cx="11277295" cy="777240"/>
           </a:xfrm>
           <a:prstGeom prst="roundRect">
             <a:avLst>
@@ -3914,7 +4106,7 @@
             </a:avLst>
           </a:prstGeom>
           <a:solidFill>
-            <a:srgbClr val="FBE4E4"/>
+            <a:srgbClr val="E8F4FA"/>
           </a:solidFill>
           <a:ln>
             <a:noFill/>
@@ -3944,20 +4136,22 @@
       </p:sp>
       <p:sp>
         <p:nvSpPr>
-          <p:cNvPr id="12" name="Rectangle 11"/>
+          <p:cNvPr id="18" name="Rounded Rectangle 17"/>
           <p:cNvSpPr/>
           <p:nvPr/>
         </p:nvSpPr>
         <p:spPr>
           <a:xfrm>
-            <a:off x="457200" y="3694176"/>
-            <a:ext cx="128016" cy="1051560"/>
-          </a:xfrm>
-          <a:prstGeom prst="rect">
-            <a:avLst/>
+            <a:off x="594360" y="4009643"/>
+            <a:ext cx="438912" cy="438912"/>
+          </a:xfrm>
+          <a:prstGeom prst="roundRect">
+            <a:avLst>
+              <a:gd name="adj" fmla="val 12000"/>
+            </a:avLst>
           </a:prstGeom>
           <a:solidFill>
-            <a:srgbClr val="A02030"/>
+            <a:srgbClr val="095292"/>
           </a:solidFill>
           <a:ln>
             <a:noFill/>
@@ -3987,14 +4181,14 @@
       </p:sp>
       <p:sp>
         <p:nvSpPr>
-          <p:cNvPr id="13" name="TextBox 12"/>
+          <p:cNvPr id="19" name="TextBox 18"/>
           <p:cNvSpPr txBox="1"/>
           <p:nvPr/>
         </p:nvSpPr>
         <p:spPr>
           <a:xfrm>
-            <a:off x="777240" y="3831336"/>
-            <a:ext cx="10774375" cy="822959"/>
+            <a:off x="594360" y="4009643"/>
+            <a:ext cx="438912" cy="438912"/>
           </a:xfrm>
           <a:prstGeom prst="rect">
             <a:avLst/>
@@ -4002,42 +4196,212 @@
           <a:noFill/>
         </p:spPr>
         <p:txBody>
-          <a:bodyPr wrap="square">
-            <a:spAutoFit/>
-          </a:bodyPr>
-          <a:lstStyle/>
-          <a:p>
-            <a:r>
-              <a:rPr sz="1200" b="1" i="0">
-                <a:solidFill>
-                  <a:srgbClr val="A02030"/>
-                </a:solidFill>
-                <a:latin typeface="Calibri"/>
-              </a:rPr>
-              <a:t>Atención</a:t>
-            </a:r>
-          </a:p>
-          <a:p>
-            <a:pPr>
-              <a:spcBef>
-                <a:spcPts val="400"/>
-              </a:spcBef>
-            </a:pPr>
-            <a:r>
-              <a:rPr sz="1400" b="0" i="0">
-                <a:solidFill>
-                  <a:srgbClr val="333333"/>
-                </a:solidFill>
-                <a:latin typeface="Calibri"/>
-              </a:rPr>
-              <a:t>«Una app para la universidad» NO sirve: sin problema concreto, todo el semestre se vuelve humo.</a:t>
-            </a:r>
-          </a:p>
-        </p:txBody>
-      </p:sp>
-      <p:sp>
-        <p:nvSpPr>
-          <p:cNvPr id="14" name="TextBox 13"/>
+          <a:bodyPr wrap="square" anchor="ctr"/>
+          <a:lstStyle/>
+          <a:p>
+            <a:pPr algn="ctr"/>
+            <a:r>
+              <a:rPr sz="1600" b="1" i="0">
+                <a:solidFill>
+                  <a:srgbClr val="FFFFFF"/>
+                </a:solidFill>
+                <a:latin typeface="Calibri"/>
+              </a:rPr>
+              <a:t>4</a:t>
+            </a:r>
+          </a:p>
+        </p:txBody>
+      </p:sp>
+      <p:sp>
+        <p:nvSpPr>
+          <p:cNvPr id="20" name="TextBox 19"/>
+          <p:cNvSpPr txBox="1"/>
+          <p:nvPr/>
+        </p:nvSpPr>
+        <p:spPr>
+          <a:xfrm>
+            <a:off x="1188720" y="3931919"/>
+            <a:ext cx="10271455" cy="612647"/>
+          </a:xfrm>
+          <a:prstGeom prst="rect">
+            <a:avLst/>
+          </a:prstGeom>
+          <a:noFill/>
+        </p:spPr>
+        <p:txBody>
+          <a:bodyPr wrap="square" anchor="ctr"/>
+          <a:lstStyle/>
+          <a:p>
+            <a:r>
+              <a:rPr sz="1500" b="1" i="0">
+                <a:solidFill>
+                  <a:srgbClr val="095292"/>
+                </a:solidFill>
+                <a:latin typeface="Calibri"/>
+              </a:rPr>
+              <a:t>Identifiquen 2-3 actores y, para cada uno, que espera obtener del sistema.</a:t>
+            </a:r>
+          </a:p>
+        </p:txBody>
+      </p:sp>
+      <p:sp>
+        <p:nvSpPr>
+          <p:cNvPr id="21" name="Rounded Rectangle 20"/>
+          <p:cNvSpPr/>
+          <p:nvPr/>
+        </p:nvSpPr>
+        <p:spPr>
+          <a:xfrm>
+            <a:off x="457200" y="4709160"/>
+            <a:ext cx="11277295" cy="777240"/>
+          </a:xfrm>
+          <a:prstGeom prst="roundRect">
+            <a:avLst>
+              <a:gd name="adj" fmla="val 12000"/>
+            </a:avLst>
+          </a:prstGeom>
+          <a:solidFill>
+            <a:srgbClr val="F2F2F2"/>
+          </a:solidFill>
+          <a:ln>
+            <a:noFill/>
+          </a:ln>
+        </p:spPr>
+        <p:style>
+          <a:lnRef idx="1">
+            <a:schemeClr val="accent1"/>
+          </a:lnRef>
+          <a:fillRef idx="3">
+            <a:schemeClr val="accent1"/>
+          </a:fillRef>
+          <a:effectRef idx="2">
+            <a:schemeClr val="accent1"/>
+          </a:effectRef>
+          <a:fontRef idx="minor">
+            <a:schemeClr val="lt1"/>
+          </a:fontRef>
+        </p:style>
+        <p:txBody>
+          <a:bodyPr rtlCol="0" anchor="ctr"/>
+          <a:lstStyle/>
+          <a:p>
+            <a:pPr algn="ctr"/>
+          </a:p>
+        </p:txBody>
+      </p:sp>
+      <p:sp>
+        <p:nvSpPr>
+          <p:cNvPr id="22" name="Rounded Rectangle 21"/>
+          <p:cNvSpPr/>
+          <p:nvPr/>
+        </p:nvSpPr>
+        <p:spPr>
+          <a:xfrm>
+            <a:off x="594360" y="4878324"/>
+            <a:ext cx="438912" cy="438912"/>
+          </a:xfrm>
+          <a:prstGeom prst="roundRect">
+            <a:avLst>
+              <a:gd name="adj" fmla="val 12000"/>
+            </a:avLst>
+          </a:prstGeom>
+          <a:solidFill>
+            <a:srgbClr val="095292"/>
+          </a:solidFill>
+          <a:ln>
+            <a:noFill/>
+          </a:ln>
+        </p:spPr>
+        <p:style>
+          <a:lnRef idx="1">
+            <a:schemeClr val="accent1"/>
+          </a:lnRef>
+          <a:fillRef idx="3">
+            <a:schemeClr val="accent1"/>
+          </a:fillRef>
+          <a:effectRef idx="2">
+            <a:schemeClr val="accent1"/>
+          </a:effectRef>
+          <a:fontRef idx="minor">
+            <a:schemeClr val="lt1"/>
+          </a:fontRef>
+        </p:style>
+        <p:txBody>
+          <a:bodyPr rtlCol="0" anchor="ctr"/>
+          <a:lstStyle/>
+          <a:p>
+            <a:pPr algn="ctr"/>
+          </a:p>
+        </p:txBody>
+      </p:sp>
+      <p:sp>
+        <p:nvSpPr>
+          <p:cNvPr id="23" name="TextBox 22"/>
+          <p:cNvSpPr txBox="1"/>
+          <p:nvPr/>
+        </p:nvSpPr>
+        <p:spPr>
+          <a:xfrm>
+            <a:off x="594360" y="4878324"/>
+            <a:ext cx="438912" cy="438912"/>
+          </a:xfrm>
+          <a:prstGeom prst="rect">
+            <a:avLst/>
+          </a:prstGeom>
+          <a:noFill/>
+        </p:spPr>
+        <p:txBody>
+          <a:bodyPr wrap="square" anchor="ctr"/>
+          <a:lstStyle/>
+          <a:p>
+            <a:pPr algn="ctr"/>
+            <a:r>
+              <a:rPr sz="1600" b="1" i="0">
+                <a:solidFill>
+                  <a:srgbClr val="FFFFFF"/>
+                </a:solidFill>
+                <a:latin typeface="Calibri"/>
+              </a:rPr>
+              <a:t>5</a:t>
+            </a:r>
+          </a:p>
+        </p:txBody>
+      </p:sp>
+      <p:sp>
+        <p:nvSpPr>
+          <p:cNvPr id="24" name="TextBox 23"/>
+          <p:cNvSpPr txBox="1"/>
+          <p:nvPr/>
+        </p:nvSpPr>
+        <p:spPr>
+          <a:xfrm>
+            <a:off x="1188720" y="4800600"/>
+            <a:ext cx="10271455" cy="612647"/>
+          </a:xfrm>
+          <a:prstGeom prst="rect">
+            <a:avLst/>
+          </a:prstGeom>
+          <a:noFill/>
+        </p:spPr>
+        <p:txBody>
+          <a:bodyPr wrap="square" anchor="ctr"/>
+          <a:lstStyle/>
+          <a:p>
+            <a:r>
+              <a:rPr sz="1500" b="1" i="0">
+                <a:solidFill>
+                  <a:srgbClr val="095292"/>
+                </a:solidFill>
+                <a:latin typeface="Calibri"/>
+              </a:rPr>
+              <a:t>Escriban explicitamente que NO hara el sistema este semestre (fuera de alcance): sin esa lista, el proyecto crece sin control.</a:t>
+            </a:r>
+          </a:p>
+        </p:txBody>
+      </p:sp>
+      <p:sp>
+        <p:nvSpPr>
+          <p:cNvPr id="25" name="TextBox 24"/>
           <p:cNvSpPr txBox="1"/>
           <p:nvPr/>
         </p:nvSpPr>
@@ -4105,6 +4469,1685 @@
         <p:spPr>
           <a:xfrm>
             <a:off x="0" y="0"/>
+            <a:ext cx="12191695" cy="960120"/>
+          </a:xfrm>
+          <a:prstGeom prst="rect">
+            <a:avLst/>
+          </a:prstGeom>
+          <a:solidFill>
+            <a:srgbClr val="095292"/>
+          </a:solidFill>
+          <a:ln>
+            <a:noFill/>
+          </a:ln>
+        </p:spPr>
+        <p:style>
+          <a:lnRef idx="1">
+            <a:schemeClr val="accent1"/>
+          </a:lnRef>
+          <a:fillRef idx="3">
+            <a:schemeClr val="accent1"/>
+          </a:fillRef>
+          <a:effectRef idx="2">
+            <a:schemeClr val="accent1"/>
+          </a:effectRef>
+          <a:fontRef idx="minor">
+            <a:schemeClr val="lt1"/>
+          </a:fontRef>
+        </p:style>
+        <p:txBody>
+          <a:bodyPr rtlCol="0" anchor="ctr"/>
+          <a:lstStyle/>
+          <a:p>
+            <a:pPr algn="ctr"/>
+          </a:p>
+        </p:txBody>
+      </p:sp>
+      <p:sp>
+        <p:nvSpPr>
+          <p:cNvPr id="3" name="Rectangle 2"/>
+          <p:cNvSpPr/>
+          <p:nvPr/>
+        </p:nvSpPr>
+        <p:spPr>
+          <a:xfrm>
+            <a:off x="0" y="960120"/>
+            <a:ext cx="12191695" cy="41148"/>
+          </a:xfrm>
+          <a:prstGeom prst="rect">
+            <a:avLst/>
+          </a:prstGeom>
+          <a:solidFill>
+            <a:srgbClr val="FFD000"/>
+          </a:solidFill>
+          <a:ln>
+            <a:noFill/>
+          </a:ln>
+        </p:spPr>
+        <p:style>
+          <a:lnRef idx="1">
+            <a:schemeClr val="accent1"/>
+          </a:lnRef>
+          <a:fillRef idx="3">
+            <a:schemeClr val="accent1"/>
+          </a:fillRef>
+          <a:effectRef idx="2">
+            <a:schemeClr val="accent1"/>
+          </a:effectRef>
+          <a:fontRef idx="minor">
+            <a:schemeClr val="lt1"/>
+          </a:fontRef>
+        </p:style>
+        <p:txBody>
+          <a:bodyPr rtlCol="0" anchor="ctr"/>
+          <a:lstStyle/>
+          <a:p>
+            <a:pPr algn="ctr"/>
+          </a:p>
+        </p:txBody>
+      </p:sp>
+      <p:sp>
+        <p:nvSpPr>
+          <p:cNvPr id="4" name="TextBox 3"/>
+          <p:cNvSpPr txBox="1"/>
+          <p:nvPr/>
+        </p:nvSpPr>
+        <p:spPr>
+          <a:xfrm>
+            <a:off x="457200" y="164592"/>
+            <a:ext cx="11277295" cy="502920"/>
+          </a:xfrm>
+          <a:prstGeom prst="rect">
+            <a:avLst/>
+          </a:prstGeom>
+          <a:noFill/>
+        </p:spPr>
+        <p:txBody>
+          <a:bodyPr wrap="square">
+            <a:spAutoFit/>
+          </a:bodyPr>
+          <a:lstStyle/>
+          <a:p>
+            <a:r>
+              <a:rPr sz="2600" b="1" i="0">
+                <a:solidFill>
+                  <a:srgbClr val="FFFFFF"/>
+                </a:solidFill>
+                <a:latin typeface="Calibri"/>
+              </a:rPr>
+              <a:t>Antes de entregar — autochequeo</a:t>
+            </a:r>
+          </a:p>
+        </p:txBody>
+      </p:sp>
+      <p:sp>
+        <p:nvSpPr>
+          <p:cNvPr id="5" name="Rounded Rectangle 4"/>
+          <p:cNvSpPr/>
+          <p:nvPr/>
+        </p:nvSpPr>
+        <p:spPr>
+          <a:xfrm>
+            <a:off x="457200" y="1261872"/>
+            <a:ext cx="11277295" cy="566928"/>
+          </a:xfrm>
+          <a:prstGeom prst="roundRect">
+            <a:avLst>
+              <a:gd name="adj" fmla="val 12000"/>
+            </a:avLst>
+          </a:prstGeom>
+          <a:solidFill>
+            <a:srgbClr val="F2F2F2"/>
+          </a:solidFill>
+          <a:ln>
+            <a:noFill/>
+          </a:ln>
+        </p:spPr>
+        <p:style>
+          <a:lnRef idx="1">
+            <a:schemeClr val="accent1"/>
+          </a:lnRef>
+          <a:fillRef idx="3">
+            <a:schemeClr val="accent1"/>
+          </a:fillRef>
+          <a:effectRef idx="2">
+            <a:schemeClr val="accent1"/>
+          </a:effectRef>
+          <a:fontRef idx="minor">
+            <a:schemeClr val="lt1"/>
+          </a:fontRef>
+        </p:style>
+        <p:txBody>
+          <a:bodyPr rtlCol="0" anchor="ctr"/>
+          <a:lstStyle/>
+          <a:p>
+            <a:pPr algn="ctr"/>
+          </a:p>
+        </p:txBody>
+      </p:sp>
+      <p:sp>
+        <p:nvSpPr>
+          <p:cNvPr id="6" name="Rectangle 5"/>
+          <p:cNvSpPr/>
+          <p:nvPr/>
+        </p:nvSpPr>
+        <p:spPr>
+          <a:xfrm>
+            <a:off x="640080" y="1408175"/>
+            <a:ext cx="274320" cy="274320"/>
+          </a:xfrm>
+          <a:prstGeom prst="rect">
+            <a:avLst/>
+          </a:prstGeom>
+          <a:solidFill>
+            <a:srgbClr val="FFFFFF"/>
+          </a:solidFill>
+          <a:ln>
+            <a:solidFill>
+              <a:srgbClr val="333333"/>
+            </a:solidFill>
+          </a:ln>
+        </p:spPr>
+        <p:style>
+          <a:lnRef idx="1">
+            <a:schemeClr val="accent1"/>
+          </a:lnRef>
+          <a:fillRef idx="3">
+            <a:schemeClr val="accent1"/>
+          </a:fillRef>
+          <a:effectRef idx="2">
+            <a:schemeClr val="accent1"/>
+          </a:effectRef>
+          <a:fontRef idx="minor">
+            <a:schemeClr val="lt1"/>
+          </a:fontRef>
+        </p:style>
+        <p:txBody>
+          <a:bodyPr rtlCol="0" anchor="ctr"/>
+          <a:lstStyle/>
+          <a:p>
+            <a:pPr algn="ctr"/>
+          </a:p>
+        </p:txBody>
+      </p:sp>
+      <p:sp>
+        <p:nvSpPr>
+          <p:cNvPr id="7" name="Rectangle 6"/>
+          <p:cNvSpPr/>
+          <p:nvPr/>
+        </p:nvSpPr>
+        <p:spPr>
+          <a:xfrm>
+            <a:off x="640080" y="1408175"/>
+            <a:ext cx="73152" cy="274320"/>
+          </a:xfrm>
+          <a:prstGeom prst="rect">
+            <a:avLst/>
+          </a:prstGeom>
+          <a:solidFill>
+            <a:srgbClr val="269CCB"/>
+          </a:solidFill>
+          <a:ln>
+            <a:noFill/>
+          </a:ln>
+        </p:spPr>
+        <p:style>
+          <a:lnRef idx="1">
+            <a:schemeClr val="accent1"/>
+          </a:lnRef>
+          <a:fillRef idx="3">
+            <a:schemeClr val="accent1"/>
+          </a:fillRef>
+          <a:effectRef idx="2">
+            <a:schemeClr val="accent1"/>
+          </a:effectRef>
+          <a:fontRef idx="minor">
+            <a:schemeClr val="lt1"/>
+          </a:fontRef>
+        </p:style>
+        <p:txBody>
+          <a:bodyPr rtlCol="0" anchor="ctr"/>
+          <a:lstStyle/>
+          <a:p>
+            <a:pPr algn="ctr"/>
+          </a:p>
+        </p:txBody>
+      </p:sp>
+      <p:sp>
+        <p:nvSpPr>
+          <p:cNvPr id="8" name="TextBox 7"/>
+          <p:cNvSpPr txBox="1"/>
+          <p:nvPr/>
+        </p:nvSpPr>
+        <p:spPr>
+          <a:xfrm>
+            <a:off x="1097280" y="1353312"/>
+            <a:ext cx="10362895" cy="402336"/>
+          </a:xfrm>
+          <a:prstGeom prst="rect">
+            <a:avLst/>
+          </a:prstGeom>
+          <a:noFill/>
+        </p:spPr>
+        <p:txBody>
+          <a:bodyPr wrap="square" anchor="ctr"/>
+          <a:lstStyle/>
+          <a:p>
+            <a:r>
+              <a:rPr sz="1500" b="0" i="0">
+                <a:solidFill>
+                  <a:srgbClr val="333333"/>
+                </a:solidFill>
+                <a:latin typeface="Calibri"/>
+              </a:rPr>
+              <a:t>¿Quien sufre el problema y como se mide hoy ese sufrimiento?</a:t>
+            </a:r>
+          </a:p>
+        </p:txBody>
+      </p:sp>
+      <p:sp>
+        <p:nvSpPr>
+          <p:cNvPr id="9" name="Rounded Rectangle 8"/>
+          <p:cNvSpPr/>
+          <p:nvPr/>
+        </p:nvSpPr>
+        <p:spPr>
+          <a:xfrm>
+            <a:off x="457200" y="1938528"/>
+            <a:ext cx="11277295" cy="566928"/>
+          </a:xfrm>
+          <a:prstGeom prst="roundRect">
+            <a:avLst>
+              <a:gd name="adj" fmla="val 12000"/>
+            </a:avLst>
+          </a:prstGeom>
+          <a:solidFill>
+            <a:srgbClr val="F2F2F2"/>
+          </a:solidFill>
+          <a:ln>
+            <a:noFill/>
+          </a:ln>
+        </p:spPr>
+        <p:style>
+          <a:lnRef idx="1">
+            <a:schemeClr val="accent1"/>
+          </a:lnRef>
+          <a:fillRef idx="3">
+            <a:schemeClr val="accent1"/>
+          </a:fillRef>
+          <a:effectRef idx="2">
+            <a:schemeClr val="accent1"/>
+          </a:effectRef>
+          <a:fontRef idx="minor">
+            <a:schemeClr val="lt1"/>
+          </a:fontRef>
+        </p:style>
+        <p:txBody>
+          <a:bodyPr rtlCol="0" anchor="ctr"/>
+          <a:lstStyle/>
+          <a:p>
+            <a:pPr algn="ctr"/>
+          </a:p>
+        </p:txBody>
+      </p:sp>
+      <p:sp>
+        <p:nvSpPr>
+          <p:cNvPr id="10" name="Rectangle 9"/>
+          <p:cNvSpPr/>
+          <p:nvPr/>
+        </p:nvSpPr>
+        <p:spPr>
+          <a:xfrm>
+            <a:off x="640080" y="2084832"/>
+            <a:ext cx="274320" cy="274320"/>
+          </a:xfrm>
+          <a:prstGeom prst="rect">
+            <a:avLst/>
+          </a:prstGeom>
+          <a:solidFill>
+            <a:srgbClr val="FFFFFF"/>
+          </a:solidFill>
+          <a:ln>
+            <a:solidFill>
+              <a:srgbClr val="333333"/>
+            </a:solidFill>
+          </a:ln>
+        </p:spPr>
+        <p:style>
+          <a:lnRef idx="1">
+            <a:schemeClr val="accent1"/>
+          </a:lnRef>
+          <a:fillRef idx="3">
+            <a:schemeClr val="accent1"/>
+          </a:fillRef>
+          <a:effectRef idx="2">
+            <a:schemeClr val="accent1"/>
+          </a:effectRef>
+          <a:fontRef idx="minor">
+            <a:schemeClr val="lt1"/>
+          </a:fontRef>
+        </p:style>
+        <p:txBody>
+          <a:bodyPr rtlCol="0" anchor="ctr"/>
+          <a:lstStyle/>
+          <a:p>
+            <a:pPr algn="ctr"/>
+          </a:p>
+        </p:txBody>
+      </p:sp>
+      <p:sp>
+        <p:nvSpPr>
+          <p:cNvPr id="11" name="Rectangle 10"/>
+          <p:cNvSpPr/>
+          <p:nvPr/>
+        </p:nvSpPr>
+        <p:spPr>
+          <a:xfrm>
+            <a:off x="640080" y="2084832"/>
+            <a:ext cx="73152" cy="274320"/>
+          </a:xfrm>
+          <a:prstGeom prst="rect">
+            <a:avLst/>
+          </a:prstGeom>
+          <a:solidFill>
+            <a:srgbClr val="269CCB"/>
+          </a:solidFill>
+          <a:ln>
+            <a:noFill/>
+          </a:ln>
+        </p:spPr>
+        <p:style>
+          <a:lnRef idx="1">
+            <a:schemeClr val="accent1"/>
+          </a:lnRef>
+          <a:fillRef idx="3">
+            <a:schemeClr val="accent1"/>
+          </a:fillRef>
+          <a:effectRef idx="2">
+            <a:schemeClr val="accent1"/>
+          </a:effectRef>
+          <a:fontRef idx="minor">
+            <a:schemeClr val="lt1"/>
+          </a:fontRef>
+        </p:style>
+        <p:txBody>
+          <a:bodyPr rtlCol="0" anchor="ctr"/>
+          <a:lstStyle/>
+          <a:p>
+            <a:pPr algn="ctr"/>
+          </a:p>
+        </p:txBody>
+      </p:sp>
+      <p:sp>
+        <p:nvSpPr>
+          <p:cNvPr id="12" name="TextBox 11"/>
+          <p:cNvSpPr txBox="1"/>
+          <p:nvPr/>
+        </p:nvSpPr>
+        <p:spPr>
+          <a:xfrm>
+            <a:off x="1097280" y="2029968"/>
+            <a:ext cx="10362895" cy="402336"/>
+          </a:xfrm>
+          <a:prstGeom prst="rect">
+            <a:avLst/>
+          </a:prstGeom>
+          <a:noFill/>
+        </p:spPr>
+        <p:txBody>
+          <a:bodyPr wrap="square" anchor="ctr"/>
+          <a:lstStyle/>
+          <a:p>
+            <a:r>
+              <a:rPr sz="1500" b="0" i="0">
+                <a:solidFill>
+                  <a:srgbClr val="333333"/>
+                </a:solidFill>
+                <a:latin typeface="Calibri"/>
+              </a:rPr>
+              <a:t>¿Un compañero de otro equipo entenderia nuestro sistema en 30 segundos, sin que se lo expliquemos?</a:t>
+            </a:r>
+          </a:p>
+        </p:txBody>
+      </p:sp>
+      <p:sp>
+        <p:nvSpPr>
+          <p:cNvPr id="13" name="Rounded Rectangle 12"/>
+          <p:cNvSpPr/>
+          <p:nvPr/>
+        </p:nvSpPr>
+        <p:spPr>
+          <a:xfrm>
+            <a:off x="457200" y="2615184"/>
+            <a:ext cx="11277295" cy="566928"/>
+          </a:xfrm>
+          <a:prstGeom prst="roundRect">
+            <a:avLst>
+              <a:gd name="adj" fmla="val 12000"/>
+            </a:avLst>
+          </a:prstGeom>
+          <a:solidFill>
+            <a:srgbClr val="F2F2F2"/>
+          </a:solidFill>
+          <a:ln>
+            <a:noFill/>
+          </a:ln>
+        </p:spPr>
+        <p:style>
+          <a:lnRef idx="1">
+            <a:schemeClr val="accent1"/>
+          </a:lnRef>
+          <a:fillRef idx="3">
+            <a:schemeClr val="accent1"/>
+          </a:fillRef>
+          <a:effectRef idx="2">
+            <a:schemeClr val="accent1"/>
+          </a:effectRef>
+          <a:fontRef idx="minor">
+            <a:schemeClr val="lt1"/>
+          </a:fontRef>
+        </p:style>
+        <p:txBody>
+          <a:bodyPr rtlCol="0" anchor="ctr"/>
+          <a:lstStyle/>
+          <a:p>
+            <a:pPr algn="ctr"/>
+          </a:p>
+        </p:txBody>
+      </p:sp>
+      <p:sp>
+        <p:nvSpPr>
+          <p:cNvPr id="14" name="Rectangle 13"/>
+          <p:cNvSpPr/>
+          <p:nvPr/>
+        </p:nvSpPr>
+        <p:spPr>
+          <a:xfrm>
+            <a:off x="640080" y="2761488"/>
+            <a:ext cx="274320" cy="274320"/>
+          </a:xfrm>
+          <a:prstGeom prst="rect">
+            <a:avLst/>
+          </a:prstGeom>
+          <a:solidFill>
+            <a:srgbClr val="FFFFFF"/>
+          </a:solidFill>
+          <a:ln>
+            <a:solidFill>
+              <a:srgbClr val="333333"/>
+            </a:solidFill>
+          </a:ln>
+        </p:spPr>
+        <p:style>
+          <a:lnRef idx="1">
+            <a:schemeClr val="accent1"/>
+          </a:lnRef>
+          <a:fillRef idx="3">
+            <a:schemeClr val="accent1"/>
+          </a:fillRef>
+          <a:effectRef idx="2">
+            <a:schemeClr val="accent1"/>
+          </a:effectRef>
+          <a:fontRef idx="minor">
+            <a:schemeClr val="lt1"/>
+          </a:fontRef>
+        </p:style>
+        <p:txBody>
+          <a:bodyPr rtlCol="0" anchor="ctr"/>
+          <a:lstStyle/>
+          <a:p>
+            <a:pPr algn="ctr"/>
+          </a:p>
+        </p:txBody>
+      </p:sp>
+      <p:sp>
+        <p:nvSpPr>
+          <p:cNvPr id="15" name="Rectangle 14"/>
+          <p:cNvSpPr/>
+          <p:nvPr/>
+        </p:nvSpPr>
+        <p:spPr>
+          <a:xfrm>
+            <a:off x="640080" y="2761488"/>
+            <a:ext cx="73152" cy="274320"/>
+          </a:xfrm>
+          <a:prstGeom prst="rect">
+            <a:avLst/>
+          </a:prstGeom>
+          <a:solidFill>
+            <a:srgbClr val="269CCB"/>
+          </a:solidFill>
+          <a:ln>
+            <a:noFill/>
+          </a:ln>
+        </p:spPr>
+        <p:style>
+          <a:lnRef idx="1">
+            <a:schemeClr val="accent1"/>
+          </a:lnRef>
+          <a:fillRef idx="3">
+            <a:schemeClr val="accent1"/>
+          </a:fillRef>
+          <a:effectRef idx="2">
+            <a:schemeClr val="accent1"/>
+          </a:effectRef>
+          <a:fontRef idx="minor">
+            <a:schemeClr val="lt1"/>
+          </a:fontRef>
+        </p:style>
+        <p:txBody>
+          <a:bodyPr rtlCol="0" anchor="ctr"/>
+          <a:lstStyle/>
+          <a:p>
+            <a:pPr algn="ctr"/>
+          </a:p>
+        </p:txBody>
+      </p:sp>
+      <p:sp>
+        <p:nvSpPr>
+          <p:cNvPr id="16" name="TextBox 15"/>
+          <p:cNvSpPr txBox="1"/>
+          <p:nvPr/>
+        </p:nvSpPr>
+        <p:spPr>
+          <a:xfrm>
+            <a:off x="1097280" y="2706624"/>
+            <a:ext cx="10362895" cy="402336"/>
+          </a:xfrm>
+          <a:prstGeom prst="rect">
+            <a:avLst/>
+          </a:prstGeom>
+          <a:noFill/>
+        </p:spPr>
+        <p:txBody>
+          <a:bodyPr wrap="square" anchor="ctr"/>
+          <a:lstStyle/>
+          <a:p>
+            <a:r>
+              <a:rPr sz="1500" b="0" i="0">
+                <a:solidFill>
+                  <a:srgbClr val="333333"/>
+                </a:solidFill>
+                <a:latin typeface="Calibri"/>
+              </a:rPr>
+              <a:t>¿Escribimos que NO hara el sistema, o dejamos la puerta abierta a que crezca sin control?</a:t>
+            </a:r>
+          </a:p>
+        </p:txBody>
+      </p:sp>
+      <p:sp>
+        <p:nvSpPr>
+          <p:cNvPr id="17" name="TextBox 16"/>
+          <p:cNvSpPr txBox="1"/>
+          <p:nvPr/>
+        </p:nvSpPr>
+        <p:spPr>
+          <a:xfrm>
+            <a:off x="11185855" y="6473952"/>
+            <a:ext cx="640080" cy="274320"/>
+          </a:xfrm>
+          <a:prstGeom prst="rect">
+            <a:avLst/>
+          </a:prstGeom>
+          <a:noFill/>
+        </p:spPr>
+        <p:txBody>
+          <a:bodyPr wrap="square">
+            <a:spAutoFit/>
+          </a:bodyPr>
+          <a:lstStyle/>
+          <a:p>
+            <a:pPr algn="r"/>
+            <a:r>
+              <a:rPr sz="1100" b="0" i="0">
+                <a:solidFill>
+                  <a:srgbClr val="666666"/>
+                </a:solidFill>
+                <a:latin typeface="Calibri"/>
+              </a:rPr>
+              <a:t>11</a:t>
+            </a:r>
+          </a:p>
+        </p:txBody>
+      </p:sp>
+    </p:spTree>
+  </p:cSld>
+  <p:clrMapOvr>
+    <a:masterClrMapping/>
+  </p:clrMapOvr>
+</p:sld>
+</file>
+
+<file path=ppt/slides/slide12.xml><?xml version="1.0" encoding="utf-8"?>
+<p:sld xmlns:a="http://schemas.openxmlformats.org/drawingml/2006/main" xmlns:p="http://schemas.openxmlformats.org/presentationml/2006/main" xmlns:r="http://schemas.openxmlformats.org/officeDocument/2006/relationships">
+  <p:cSld>
+    <p:bg>
+      <p:bgPr>
+        <a:solidFill>
+          <a:srgbClr val="FFFFFF"/>
+        </a:solidFill>
+        <a:effectLst/>
+      </p:bgPr>
+    </p:bg>
+    <p:spTree>
+      <p:nvGrpSpPr>
+        <p:cNvPr id="1" name=""/>
+        <p:cNvGrpSpPr/>
+        <p:nvPr/>
+      </p:nvGrpSpPr>
+      <p:grpSpPr/>
+      <p:sp>
+        <p:nvSpPr>
+          <p:cNvPr id="2" name="Rectangle 1"/>
+          <p:cNvSpPr/>
+          <p:nvPr/>
+        </p:nvSpPr>
+        <p:spPr>
+          <a:xfrm>
+            <a:off x="0" y="0"/>
+            <a:ext cx="12191695" cy="960120"/>
+          </a:xfrm>
+          <a:prstGeom prst="rect">
+            <a:avLst/>
+          </a:prstGeom>
+          <a:solidFill>
+            <a:srgbClr val="095292"/>
+          </a:solidFill>
+          <a:ln>
+            <a:noFill/>
+          </a:ln>
+        </p:spPr>
+        <p:style>
+          <a:lnRef idx="1">
+            <a:schemeClr val="accent1"/>
+          </a:lnRef>
+          <a:fillRef idx="3">
+            <a:schemeClr val="accent1"/>
+          </a:fillRef>
+          <a:effectRef idx="2">
+            <a:schemeClr val="accent1"/>
+          </a:effectRef>
+          <a:fontRef idx="minor">
+            <a:schemeClr val="lt1"/>
+          </a:fontRef>
+        </p:style>
+        <p:txBody>
+          <a:bodyPr rtlCol="0" anchor="ctr"/>
+          <a:lstStyle/>
+          <a:p>
+            <a:pPr algn="ctr"/>
+          </a:p>
+        </p:txBody>
+      </p:sp>
+      <p:sp>
+        <p:nvSpPr>
+          <p:cNvPr id="3" name="Rectangle 2"/>
+          <p:cNvSpPr/>
+          <p:nvPr/>
+        </p:nvSpPr>
+        <p:spPr>
+          <a:xfrm>
+            <a:off x="0" y="960120"/>
+            <a:ext cx="12191695" cy="41148"/>
+          </a:xfrm>
+          <a:prstGeom prst="rect">
+            <a:avLst/>
+          </a:prstGeom>
+          <a:solidFill>
+            <a:srgbClr val="FFD000"/>
+          </a:solidFill>
+          <a:ln>
+            <a:noFill/>
+          </a:ln>
+        </p:spPr>
+        <p:style>
+          <a:lnRef idx="1">
+            <a:schemeClr val="accent1"/>
+          </a:lnRef>
+          <a:fillRef idx="3">
+            <a:schemeClr val="accent1"/>
+          </a:fillRef>
+          <a:effectRef idx="2">
+            <a:schemeClr val="accent1"/>
+          </a:effectRef>
+          <a:fontRef idx="minor">
+            <a:schemeClr val="lt1"/>
+          </a:fontRef>
+        </p:style>
+        <p:txBody>
+          <a:bodyPr rtlCol="0" anchor="ctr"/>
+          <a:lstStyle/>
+          <a:p>
+            <a:pPr algn="ctr"/>
+          </a:p>
+        </p:txBody>
+      </p:sp>
+      <p:sp>
+        <p:nvSpPr>
+          <p:cNvPr id="4" name="TextBox 3"/>
+          <p:cNvSpPr txBox="1"/>
+          <p:nvPr/>
+        </p:nvSpPr>
+        <p:spPr>
+          <a:xfrm>
+            <a:off x="457200" y="164592"/>
+            <a:ext cx="11277295" cy="502920"/>
+          </a:xfrm>
+          <a:prstGeom prst="rect">
+            <a:avLst/>
+          </a:prstGeom>
+          <a:noFill/>
+        </p:spPr>
+        <p:txBody>
+          <a:bodyPr wrap="square">
+            <a:spAutoFit/>
+          </a:bodyPr>
+          <a:lstStyle/>
+          <a:p>
+            <a:r>
+              <a:rPr sz="2600" b="1" i="0">
+                <a:solidFill>
+                  <a:srgbClr val="FFFFFF"/>
+                </a:solidFill>
+                <a:latin typeface="Calibri"/>
+              </a:rPr>
+              <a:t>Criterios de exito / entregable</a:t>
+            </a:r>
+          </a:p>
+        </p:txBody>
+      </p:sp>
+      <p:sp>
+        <p:nvSpPr>
+          <p:cNvPr id="5" name="TextBox 4"/>
+          <p:cNvSpPr txBox="1"/>
+          <p:nvPr/>
+        </p:nvSpPr>
+        <p:spPr>
+          <a:xfrm>
+            <a:off x="457200" y="1170432"/>
+            <a:ext cx="11277295" cy="5230368"/>
+          </a:xfrm>
+          <a:prstGeom prst="rect">
+            <a:avLst/>
+          </a:prstGeom>
+          <a:noFill/>
+        </p:spPr>
+        <p:txBody>
+          <a:bodyPr wrap="square">
+            <a:spAutoFit/>
+          </a:bodyPr>
+          <a:lstStyle/>
+          <a:p>
+            <a:pPr>
+              <a:spcAft>
+                <a:spcPts val="800"/>
+              </a:spcAft>
+            </a:pPr>
+            <a:r>
+              <a:rPr sz="1600" b="0" i="0">
+                <a:solidFill>
+                  <a:srgbClr val="333333"/>
+                </a:solidFill>
+                <a:latin typeface="Calibri"/>
+              </a:rPr>
+              <a:t>–   </a:t>
+            </a:r>
+            <a:r>
+              <a:rPr sz="1600" b="1" i="0">
+                <a:solidFill>
+                  <a:srgbClr val="333333"/>
+                </a:solidFill>
+                <a:latin typeface="Calibri"/>
+              </a:rPr>
+              <a:t>Entregable:</a:t>
+            </a:r>
+            <a:r>
+              <a:rPr sz="1600" b="0" i="0">
+                <a:solidFill>
+                  <a:srgbClr val="333333"/>
+                </a:solidFill>
+                <a:latin typeface="Calibri"/>
+              </a:rPr>
+              <a:t> Ficha del equipo: problema en 2-3 frases, 3-5 capacidades, 2-3 actores y lo que queda fuera de alcance</a:t>
+            </a:r>
+          </a:p>
+          <a:p>
+            <a:pPr>
+              <a:spcAft>
+                <a:spcPts val="800"/>
+              </a:spcAft>
+            </a:pPr>
+            <a:r>
+              <a:rPr sz="1600" b="0" i="0">
+                <a:solidFill>
+                  <a:srgbClr val="333333"/>
+                </a:solidFill>
+                <a:latin typeface="Calibri"/>
+              </a:rPr>
+              <a:t>–   </a:t>
+            </a:r>
+            <a:r>
+              <a:rPr sz="1600" b="1" i="0">
+                <a:solidFill>
+                  <a:srgbClr val="333333"/>
+                </a:solidFill>
+                <a:latin typeface="Calibri"/>
+              </a:rPr>
+              <a:t>Exito:</a:t>
+            </a:r>
+            <a:r>
+              <a:rPr sz="1600" b="0" i="0">
+                <a:solidFill>
+                  <a:srgbClr val="333333"/>
+                </a:solidFill>
+                <a:latin typeface="Calibri"/>
+              </a:rPr>
+              <a:t> El problema nombra un actor concreto y un dolor observable, no una generalidad.</a:t>
+            </a:r>
+          </a:p>
+          <a:p>
+            <a:pPr>
+              <a:spcAft>
+                <a:spcPts val="800"/>
+              </a:spcAft>
+            </a:pPr>
+            <a:r>
+              <a:rPr sz="1600" b="0" i="0">
+                <a:solidFill>
+                  <a:srgbClr val="333333"/>
+                </a:solidFill>
+                <a:latin typeface="Calibri"/>
+              </a:rPr>
+              <a:t>–   </a:t>
+            </a:r>
+            <a:r>
+              <a:rPr sz="1600" b="1" i="0">
+                <a:solidFill>
+                  <a:srgbClr val="333333"/>
+                </a:solidFill>
+                <a:latin typeface="Calibri"/>
+              </a:rPr>
+              <a:t>Exito:</a:t>
+            </a:r>
+            <a:r>
+              <a:rPr sz="1600" b="0" i="0">
+                <a:solidFill>
+                  <a:srgbClr val="333333"/>
+                </a:solidFill>
+                <a:latin typeface="Calibri"/>
+              </a:rPr>
+              <a:t> Las capacidades estan escritas como verbos de negocio y son entre 3 y 5.</a:t>
+            </a:r>
+          </a:p>
+          <a:p>
+            <a:pPr>
+              <a:spcAft>
+                <a:spcPts val="800"/>
+              </a:spcAft>
+            </a:pPr>
+            <a:r>
+              <a:rPr sz="1600" b="0" i="0">
+                <a:solidFill>
+                  <a:srgbClr val="333333"/>
+                </a:solidFill>
+                <a:latin typeface="Calibri"/>
+              </a:rPr>
+              <a:t>–   </a:t>
+            </a:r>
+            <a:r>
+              <a:rPr sz="1600" b="1" i="0">
+                <a:solidFill>
+                  <a:srgbClr val="333333"/>
+                </a:solidFill>
+                <a:latin typeface="Calibri"/>
+              </a:rPr>
+              <a:t>Exito:</a:t>
+            </a:r>
+            <a:r>
+              <a:rPr sz="1600" b="0" i="0">
+                <a:solidFill>
+                  <a:srgbClr val="333333"/>
+                </a:solidFill>
+                <a:latin typeface="Calibri"/>
+              </a:rPr>
+              <a:t> Los actores identificados tienen un interes explicito, no solo un nombre.</a:t>
+            </a:r>
+          </a:p>
+          <a:p>
+            <a:pPr>
+              <a:spcAft>
+                <a:spcPts val="800"/>
+              </a:spcAft>
+            </a:pPr>
+            <a:r>
+              <a:rPr sz="1600" b="0" i="0">
+                <a:solidFill>
+                  <a:srgbClr val="333333"/>
+                </a:solidFill>
+                <a:latin typeface="Calibri"/>
+              </a:rPr>
+              <a:t>–   </a:t>
+            </a:r>
+            <a:r>
+              <a:rPr sz="1600" b="1" i="0">
+                <a:solidFill>
+                  <a:srgbClr val="333333"/>
+                </a:solidFill>
+                <a:latin typeface="Calibri"/>
+              </a:rPr>
+              <a:t>Exito:</a:t>
+            </a:r>
+            <a:r>
+              <a:rPr sz="1600" b="0" i="0">
+                <a:solidFill>
+                  <a:srgbClr val="333333"/>
+                </a:solidFill>
+                <a:latin typeface="Calibri"/>
+              </a:rPr>
+              <a:t> La lista de fuera de alcance existe y es especifica.</a:t>
+            </a:r>
+          </a:p>
+          <a:p>
+            <a:pPr>
+              <a:spcAft>
+                <a:spcPts val="800"/>
+              </a:spcAft>
+            </a:pPr>
+            <a:r>
+              <a:rPr sz="1600" b="0" i="0">
+                <a:solidFill>
+                  <a:srgbClr val="333333"/>
+                </a:solidFill>
+                <a:latin typeface="Calibri"/>
+              </a:rPr>
+              <a:t>–   </a:t>
+            </a:r>
+            <a:r>
+              <a:rPr sz="1600" b="1" i="0">
+                <a:solidFill>
+                  <a:srgbClr val="333333"/>
+                </a:solidFill>
+                <a:latin typeface="Calibri"/>
+              </a:rPr>
+              <a:t>Entrega en ExamLab (examlab.lovable.app/app)</a:t>
+            </a:r>
+            <a:r>
+              <a:rPr sz="1600" b="0" i="0">
+                <a:solidFill>
+                  <a:srgbClr val="333333"/>
+                </a:solidFill>
+                <a:latin typeface="Calibri"/>
+              </a:rPr>
+              <a:t> — domingo 23:59.</a:t>
+            </a:r>
+          </a:p>
+        </p:txBody>
+      </p:sp>
+      <p:sp>
+        <p:nvSpPr>
+          <p:cNvPr id="6" name="TextBox 5"/>
+          <p:cNvSpPr txBox="1"/>
+          <p:nvPr/>
+        </p:nvSpPr>
+        <p:spPr>
+          <a:xfrm>
+            <a:off x="11185855" y="6473952"/>
+            <a:ext cx="640080" cy="274320"/>
+          </a:xfrm>
+          <a:prstGeom prst="rect">
+            <a:avLst/>
+          </a:prstGeom>
+          <a:noFill/>
+        </p:spPr>
+        <p:txBody>
+          <a:bodyPr wrap="square">
+            <a:spAutoFit/>
+          </a:bodyPr>
+          <a:lstStyle/>
+          <a:p>
+            <a:pPr algn="r"/>
+            <a:r>
+              <a:rPr sz="1100" b="0" i="0">
+                <a:solidFill>
+                  <a:srgbClr val="666666"/>
+                </a:solidFill>
+                <a:latin typeface="Calibri"/>
+              </a:rPr>
+              <a:t>12</a:t>
+            </a:r>
+          </a:p>
+        </p:txBody>
+      </p:sp>
+    </p:spTree>
+  </p:cSld>
+  <p:clrMapOvr>
+    <a:masterClrMapping/>
+  </p:clrMapOvr>
+</p:sld>
+</file>
+
+<file path=ppt/slides/slide13.xml><?xml version="1.0" encoding="utf-8"?>
+<p:sld xmlns:a="http://schemas.openxmlformats.org/drawingml/2006/main" xmlns:p="http://schemas.openxmlformats.org/presentationml/2006/main" xmlns:r="http://schemas.openxmlformats.org/officeDocument/2006/relationships">
+  <p:cSld>
+    <p:bg>
+      <p:bgPr>
+        <a:solidFill>
+          <a:srgbClr val="FFFFFF"/>
+        </a:solidFill>
+        <a:effectLst/>
+      </p:bgPr>
+    </p:bg>
+    <p:spTree>
+      <p:nvGrpSpPr>
+        <p:cNvPr id="1" name=""/>
+        <p:cNvGrpSpPr/>
+        <p:nvPr/>
+      </p:nvGrpSpPr>
+      <p:grpSpPr/>
+      <p:sp>
+        <p:nvSpPr>
+          <p:cNvPr id="2" name="Rectangle 1"/>
+          <p:cNvSpPr/>
+          <p:nvPr/>
+        </p:nvSpPr>
+        <p:spPr>
+          <a:xfrm>
+            <a:off x="0" y="0"/>
+            <a:ext cx="12191695" cy="960120"/>
+          </a:xfrm>
+          <a:prstGeom prst="rect">
+            <a:avLst/>
+          </a:prstGeom>
+          <a:solidFill>
+            <a:srgbClr val="095292"/>
+          </a:solidFill>
+          <a:ln>
+            <a:noFill/>
+          </a:ln>
+        </p:spPr>
+        <p:style>
+          <a:lnRef idx="1">
+            <a:schemeClr val="accent1"/>
+          </a:lnRef>
+          <a:fillRef idx="3">
+            <a:schemeClr val="accent1"/>
+          </a:fillRef>
+          <a:effectRef idx="2">
+            <a:schemeClr val="accent1"/>
+          </a:effectRef>
+          <a:fontRef idx="minor">
+            <a:schemeClr val="lt1"/>
+          </a:fontRef>
+        </p:style>
+        <p:txBody>
+          <a:bodyPr rtlCol="0" anchor="ctr"/>
+          <a:lstStyle/>
+          <a:p>
+            <a:pPr algn="ctr"/>
+          </a:p>
+        </p:txBody>
+      </p:sp>
+      <p:sp>
+        <p:nvSpPr>
+          <p:cNvPr id="3" name="Rectangle 2"/>
+          <p:cNvSpPr/>
+          <p:nvPr/>
+        </p:nvSpPr>
+        <p:spPr>
+          <a:xfrm>
+            <a:off x="0" y="960120"/>
+            <a:ext cx="12191695" cy="41148"/>
+          </a:xfrm>
+          <a:prstGeom prst="rect">
+            <a:avLst/>
+          </a:prstGeom>
+          <a:solidFill>
+            <a:srgbClr val="FFD000"/>
+          </a:solidFill>
+          <a:ln>
+            <a:noFill/>
+          </a:ln>
+        </p:spPr>
+        <p:style>
+          <a:lnRef idx="1">
+            <a:schemeClr val="accent1"/>
+          </a:lnRef>
+          <a:fillRef idx="3">
+            <a:schemeClr val="accent1"/>
+          </a:fillRef>
+          <a:effectRef idx="2">
+            <a:schemeClr val="accent1"/>
+          </a:effectRef>
+          <a:fontRef idx="minor">
+            <a:schemeClr val="lt1"/>
+          </a:fontRef>
+        </p:style>
+        <p:txBody>
+          <a:bodyPr rtlCol="0" anchor="ctr"/>
+          <a:lstStyle/>
+          <a:p>
+            <a:pPr algn="ctr"/>
+          </a:p>
+        </p:txBody>
+      </p:sp>
+      <p:sp>
+        <p:nvSpPr>
+          <p:cNvPr id="4" name="TextBox 3"/>
+          <p:cNvSpPr txBox="1"/>
+          <p:nvPr/>
+        </p:nvSpPr>
+        <p:spPr>
+          <a:xfrm>
+            <a:off x="457200" y="164592"/>
+            <a:ext cx="11277295" cy="502920"/>
+          </a:xfrm>
+          <a:prstGeom prst="rect">
+            <a:avLst/>
+          </a:prstGeom>
+          <a:noFill/>
+        </p:spPr>
+        <p:txBody>
+          <a:bodyPr wrap="square">
+            <a:spAutoFit/>
+          </a:bodyPr>
+          <a:lstStyle/>
+          <a:p>
+            <a:r>
+              <a:rPr sz="2600" b="1" i="0">
+                <a:solidFill>
+                  <a:srgbClr val="FFFFFF"/>
+                </a:solidFill>
+                <a:latin typeface="Calibri"/>
+              </a:rPr>
+              <a:t>Para el PI esta semana</a:t>
+            </a:r>
+          </a:p>
+        </p:txBody>
+      </p:sp>
+      <p:sp>
+        <p:nvSpPr>
+          <p:cNvPr id="5" name="Rounded Rectangle 4"/>
+          <p:cNvSpPr/>
+          <p:nvPr/>
+        </p:nvSpPr>
+        <p:spPr>
+          <a:xfrm>
+            <a:off x="457200" y="1261872"/>
+            <a:ext cx="11277295" cy="1051560"/>
+          </a:xfrm>
+          <a:prstGeom prst="roundRect">
+            <a:avLst>
+              <a:gd name="adj" fmla="val 12000"/>
+            </a:avLst>
+          </a:prstGeom>
+          <a:solidFill>
+            <a:srgbClr val="E8F4FA"/>
+          </a:solidFill>
+          <a:ln>
+            <a:noFill/>
+          </a:ln>
+        </p:spPr>
+        <p:style>
+          <a:lnRef idx="1">
+            <a:schemeClr val="accent1"/>
+          </a:lnRef>
+          <a:fillRef idx="3">
+            <a:schemeClr val="accent1"/>
+          </a:fillRef>
+          <a:effectRef idx="2">
+            <a:schemeClr val="accent1"/>
+          </a:effectRef>
+          <a:fontRef idx="minor">
+            <a:schemeClr val="lt1"/>
+          </a:fontRef>
+        </p:style>
+        <p:txBody>
+          <a:bodyPr rtlCol="0" anchor="ctr"/>
+          <a:lstStyle/>
+          <a:p>
+            <a:pPr algn="ctr"/>
+          </a:p>
+        </p:txBody>
+      </p:sp>
+      <p:sp>
+        <p:nvSpPr>
+          <p:cNvPr id="6" name="Rectangle 5"/>
+          <p:cNvSpPr/>
+          <p:nvPr/>
+        </p:nvSpPr>
+        <p:spPr>
+          <a:xfrm>
+            <a:off x="457200" y="1261872"/>
+            <a:ext cx="128016" cy="1051560"/>
+          </a:xfrm>
+          <a:prstGeom prst="rect">
+            <a:avLst/>
+          </a:prstGeom>
+          <a:solidFill>
+            <a:srgbClr val="269CCB"/>
+          </a:solidFill>
+          <a:ln>
+            <a:noFill/>
+          </a:ln>
+        </p:spPr>
+        <p:style>
+          <a:lnRef idx="1">
+            <a:schemeClr val="accent1"/>
+          </a:lnRef>
+          <a:fillRef idx="3">
+            <a:schemeClr val="accent1"/>
+          </a:fillRef>
+          <a:effectRef idx="2">
+            <a:schemeClr val="accent1"/>
+          </a:effectRef>
+          <a:fontRef idx="minor">
+            <a:schemeClr val="lt1"/>
+          </a:fontRef>
+        </p:style>
+        <p:txBody>
+          <a:bodyPr rtlCol="0" anchor="ctr"/>
+          <a:lstStyle/>
+          <a:p>
+            <a:pPr algn="ctr"/>
+          </a:p>
+        </p:txBody>
+      </p:sp>
+      <p:sp>
+        <p:nvSpPr>
+          <p:cNvPr id="7" name="TextBox 6"/>
+          <p:cNvSpPr txBox="1"/>
+          <p:nvPr/>
+        </p:nvSpPr>
+        <p:spPr>
+          <a:xfrm>
+            <a:off x="777240" y="1399031"/>
+            <a:ext cx="10774375" cy="822959"/>
+          </a:xfrm>
+          <a:prstGeom prst="rect">
+            <a:avLst/>
+          </a:prstGeom>
+          <a:noFill/>
+        </p:spPr>
+        <p:txBody>
+          <a:bodyPr wrap="square">
+            <a:spAutoFit/>
+          </a:bodyPr>
+          <a:lstStyle/>
+          <a:p>
+            <a:r>
+              <a:rPr sz="1200" b="1" i="0">
+                <a:solidFill>
+                  <a:srgbClr val="269CCB"/>
+                </a:solidFill>
+                <a:latin typeface="Calibri"/>
+              </a:rPr>
+              <a:t>Info</a:t>
+            </a:r>
+          </a:p>
+          <a:p>
+            <a:pPr>
+              <a:spcBef>
+                <a:spcPts val="400"/>
+              </a:spcBef>
+            </a:pPr>
+            <a:r>
+              <a:rPr sz="1400" b="0" i="0">
+                <a:solidFill>
+                  <a:srgbClr val="333333"/>
+                </a:solidFill>
+                <a:latin typeface="Calibri"/>
+              </a:rPr>
+              <a:t>Hito: Equipo conformado y dominio del proyecto acotado</a:t>
+            </a:r>
+          </a:p>
+        </p:txBody>
+      </p:sp>
+      <p:sp>
+        <p:nvSpPr>
+          <p:cNvPr id="8" name="Rounded Rectangle 7"/>
+          <p:cNvSpPr/>
+          <p:nvPr/>
+        </p:nvSpPr>
+        <p:spPr>
+          <a:xfrm>
+            <a:off x="457200" y="2478024"/>
+            <a:ext cx="11277295" cy="1051560"/>
+          </a:xfrm>
+          <a:prstGeom prst="roundRect">
+            <a:avLst>
+              <a:gd name="adj" fmla="val 12000"/>
+            </a:avLst>
+          </a:prstGeom>
+          <a:solidFill>
+            <a:srgbClr val="FFF8E1"/>
+          </a:solidFill>
+          <a:ln>
+            <a:noFill/>
+          </a:ln>
+        </p:spPr>
+        <p:style>
+          <a:lnRef idx="1">
+            <a:schemeClr val="accent1"/>
+          </a:lnRef>
+          <a:fillRef idx="3">
+            <a:schemeClr val="accent1"/>
+          </a:fillRef>
+          <a:effectRef idx="2">
+            <a:schemeClr val="accent1"/>
+          </a:effectRef>
+          <a:fontRef idx="minor">
+            <a:schemeClr val="lt1"/>
+          </a:fontRef>
+        </p:style>
+        <p:txBody>
+          <a:bodyPr rtlCol="0" anchor="ctr"/>
+          <a:lstStyle/>
+          <a:p>
+            <a:pPr algn="ctr"/>
+          </a:p>
+        </p:txBody>
+      </p:sp>
+      <p:sp>
+        <p:nvSpPr>
+          <p:cNvPr id="9" name="Rectangle 8"/>
+          <p:cNvSpPr/>
+          <p:nvPr/>
+        </p:nvSpPr>
+        <p:spPr>
+          <a:xfrm>
+            <a:off x="457200" y="2478024"/>
+            <a:ext cx="128016" cy="1051560"/>
+          </a:xfrm>
+          <a:prstGeom prst="rect">
+            <a:avLst/>
+          </a:prstGeom>
+          <a:solidFill>
+            <a:srgbClr val="FFD000"/>
+          </a:solidFill>
+          <a:ln>
+            <a:noFill/>
+          </a:ln>
+        </p:spPr>
+        <p:style>
+          <a:lnRef idx="1">
+            <a:schemeClr val="accent1"/>
+          </a:lnRef>
+          <a:fillRef idx="3">
+            <a:schemeClr val="accent1"/>
+          </a:fillRef>
+          <a:effectRef idx="2">
+            <a:schemeClr val="accent1"/>
+          </a:effectRef>
+          <a:fontRef idx="minor">
+            <a:schemeClr val="lt1"/>
+          </a:fontRef>
+        </p:style>
+        <p:txBody>
+          <a:bodyPr rtlCol="0" anchor="ctr"/>
+          <a:lstStyle/>
+          <a:p>
+            <a:pPr algn="ctr"/>
+          </a:p>
+        </p:txBody>
+      </p:sp>
+      <p:sp>
+        <p:nvSpPr>
+          <p:cNvPr id="10" name="TextBox 9"/>
+          <p:cNvSpPr txBox="1"/>
+          <p:nvPr/>
+        </p:nvSpPr>
+        <p:spPr>
+          <a:xfrm>
+            <a:off x="777240" y="2615184"/>
+            <a:ext cx="10774375" cy="822959"/>
+          </a:xfrm>
+          <a:prstGeom prst="rect">
+            <a:avLst/>
+          </a:prstGeom>
+          <a:noFill/>
+        </p:spPr>
+        <p:txBody>
+          <a:bodyPr wrap="square">
+            <a:spAutoFit/>
+          </a:bodyPr>
+          <a:lstStyle/>
+          <a:p>
+            <a:r>
+              <a:rPr sz="1200" b="1" i="0">
+                <a:solidFill>
+                  <a:srgbClr val="FFD000"/>
+                </a:solidFill>
+                <a:latin typeface="Calibri"/>
+              </a:rPr>
+              <a:t>Aclaración</a:t>
+            </a:r>
+          </a:p>
+          <a:p>
+            <a:pPr>
+              <a:spcBef>
+                <a:spcPts val="400"/>
+              </a:spcBef>
+            </a:pPr>
+            <a:r>
+              <a:rPr sz="1400" b="0" i="0">
+                <a:solidFill>
+                  <a:srgbClr val="333333"/>
+                </a:solidFill>
+                <a:latin typeface="Calibri"/>
+              </a:rPr>
+              <a:t>Enunciado completo: Clases/Proyecto Integrador/ (VetCare).</a:t>
+            </a:r>
+          </a:p>
+        </p:txBody>
+      </p:sp>
+      <p:sp>
+        <p:nvSpPr>
+          <p:cNvPr id="11" name="Rounded Rectangle 10"/>
+          <p:cNvSpPr/>
+          <p:nvPr/>
+        </p:nvSpPr>
+        <p:spPr>
+          <a:xfrm>
+            <a:off x="457200" y="3694176"/>
+            <a:ext cx="11277295" cy="1051560"/>
+          </a:xfrm>
+          <a:prstGeom prst="roundRect">
+            <a:avLst>
+              <a:gd name="adj" fmla="val 12000"/>
+            </a:avLst>
+          </a:prstGeom>
+          <a:solidFill>
+            <a:srgbClr val="FBE4E4"/>
+          </a:solidFill>
+          <a:ln>
+            <a:noFill/>
+          </a:ln>
+        </p:spPr>
+        <p:style>
+          <a:lnRef idx="1">
+            <a:schemeClr val="accent1"/>
+          </a:lnRef>
+          <a:fillRef idx="3">
+            <a:schemeClr val="accent1"/>
+          </a:fillRef>
+          <a:effectRef idx="2">
+            <a:schemeClr val="accent1"/>
+          </a:effectRef>
+          <a:fontRef idx="minor">
+            <a:schemeClr val="lt1"/>
+          </a:fontRef>
+        </p:style>
+        <p:txBody>
+          <a:bodyPr rtlCol="0" anchor="ctr"/>
+          <a:lstStyle/>
+          <a:p>
+            <a:pPr algn="ctr"/>
+          </a:p>
+        </p:txBody>
+      </p:sp>
+      <p:sp>
+        <p:nvSpPr>
+          <p:cNvPr id="12" name="Rectangle 11"/>
+          <p:cNvSpPr/>
+          <p:nvPr/>
+        </p:nvSpPr>
+        <p:spPr>
+          <a:xfrm>
+            <a:off x="457200" y="3694176"/>
+            <a:ext cx="128016" cy="1051560"/>
+          </a:xfrm>
+          <a:prstGeom prst="rect">
+            <a:avLst/>
+          </a:prstGeom>
+          <a:solidFill>
+            <a:srgbClr val="A02030"/>
+          </a:solidFill>
+          <a:ln>
+            <a:noFill/>
+          </a:ln>
+        </p:spPr>
+        <p:style>
+          <a:lnRef idx="1">
+            <a:schemeClr val="accent1"/>
+          </a:lnRef>
+          <a:fillRef idx="3">
+            <a:schemeClr val="accent1"/>
+          </a:fillRef>
+          <a:effectRef idx="2">
+            <a:schemeClr val="accent1"/>
+          </a:effectRef>
+          <a:fontRef idx="minor">
+            <a:schemeClr val="lt1"/>
+          </a:fontRef>
+        </p:style>
+        <p:txBody>
+          <a:bodyPr rtlCol="0" anchor="ctr"/>
+          <a:lstStyle/>
+          <a:p>
+            <a:pPr algn="ctr"/>
+          </a:p>
+        </p:txBody>
+      </p:sp>
+      <p:sp>
+        <p:nvSpPr>
+          <p:cNvPr id="13" name="TextBox 12"/>
+          <p:cNvSpPr txBox="1"/>
+          <p:nvPr/>
+        </p:nvSpPr>
+        <p:spPr>
+          <a:xfrm>
+            <a:off x="777240" y="3831336"/>
+            <a:ext cx="10774375" cy="822959"/>
+          </a:xfrm>
+          <a:prstGeom prst="rect">
+            <a:avLst/>
+          </a:prstGeom>
+          <a:noFill/>
+        </p:spPr>
+        <p:txBody>
+          <a:bodyPr wrap="square">
+            <a:spAutoFit/>
+          </a:bodyPr>
+          <a:lstStyle/>
+          <a:p>
+            <a:r>
+              <a:rPr sz="1200" b="1" i="0">
+                <a:solidFill>
+                  <a:srgbClr val="A02030"/>
+                </a:solidFill>
+                <a:latin typeface="Calibri"/>
+              </a:rPr>
+              <a:t>Atención</a:t>
+            </a:r>
+          </a:p>
+          <a:p>
+            <a:pPr>
+              <a:spcBef>
+                <a:spcPts val="400"/>
+              </a:spcBef>
+            </a:pPr>
+            <a:r>
+              <a:rPr sz="1400" b="0" i="0">
+                <a:solidFill>
+                  <a:srgbClr val="333333"/>
+                </a:solidFill>
+                <a:latin typeface="Calibri"/>
+              </a:rPr>
+              <a:t>Entrega del taller en ExamLab (examlab.lovable.app/app) · domingo 23:59.</a:t>
+            </a:r>
+          </a:p>
+        </p:txBody>
+      </p:sp>
+      <p:sp>
+        <p:nvSpPr>
+          <p:cNvPr id="14" name="TextBox 13"/>
+          <p:cNvSpPr txBox="1"/>
+          <p:nvPr/>
+        </p:nvSpPr>
+        <p:spPr>
+          <a:xfrm>
+            <a:off x="11185855" y="6473952"/>
+            <a:ext cx="640080" cy="274320"/>
+          </a:xfrm>
+          <a:prstGeom prst="rect">
+            <a:avLst/>
+          </a:prstGeom>
+          <a:noFill/>
+        </p:spPr>
+        <p:txBody>
+          <a:bodyPr wrap="square">
+            <a:spAutoFit/>
+          </a:bodyPr>
+          <a:lstStyle/>
+          <a:p>
+            <a:pPr algn="r"/>
+            <a:r>
+              <a:rPr sz="1100" b="0" i="0">
+                <a:solidFill>
+                  <a:srgbClr val="666666"/>
+                </a:solidFill>
+                <a:latin typeface="Calibri"/>
+              </a:rPr>
+              <a:t>13</a:t>
+            </a:r>
+          </a:p>
+        </p:txBody>
+      </p:sp>
+    </p:spTree>
+  </p:cSld>
+  <p:clrMapOvr>
+    <a:masterClrMapping/>
+  </p:clrMapOvr>
+</p:sld>
+</file>
+
+<file path=ppt/slides/slide14.xml><?xml version="1.0" encoding="utf-8"?>
+<p:sld xmlns:a="http://schemas.openxmlformats.org/drawingml/2006/main" xmlns:p="http://schemas.openxmlformats.org/presentationml/2006/main" xmlns:r="http://schemas.openxmlformats.org/officeDocument/2006/relationships">
+  <p:cSld>
+    <p:bg>
+      <p:bgPr>
+        <a:solidFill>
+          <a:srgbClr val="FFFFFF"/>
+        </a:solidFill>
+        <a:effectLst/>
+      </p:bgPr>
+    </p:bg>
+    <p:spTree>
+      <p:nvGrpSpPr>
+        <p:cNvPr id="1" name=""/>
+        <p:cNvGrpSpPr/>
+        <p:nvPr/>
+      </p:nvGrpSpPr>
+      <p:grpSpPr/>
+      <p:sp>
+        <p:nvSpPr>
+          <p:cNvPr id="2" name="Rectangle 1"/>
+          <p:cNvSpPr/>
+          <p:nvPr/>
+        </p:nvSpPr>
+        <p:spPr>
+          <a:xfrm>
+            <a:off x="0" y="0"/>
             <a:ext cx="12191695" cy="164592"/>
           </a:xfrm>
           <a:prstGeom prst="rect">
@@ -4191,7 +6234,7 @@
                 </a:solidFill>
                 <a:latin typeface="Calibri"/>
               </a:rPr>
-              <a:t>Clase 1 lista</a:t>
+              <a:t>Clase 1 · VetCare avanza</a:t>
             </a:r>
           </a:p>
         </p:txBody>
@@ -4230,7 +6273,7 @@
                 </a:solidFill>
                 <a:latin typeface="Calibri"/>
               </a:rPr>
-              <a:t>Ya distinguen programar de diseñar</a:t>
+              <a:t>Equipo conformado y dominio del proyecto acotado</a:t>
             </a:r>
           </a:p>
           <a:p>
@@ -4246,7 +6289,7 @@
                 </a:solidFill>
                 <a:latin typeface="Calibri"/>
               </a:rPr>
-              <a:t>Equipo conformado y dominio acotado</a:t>
+              <a:t>Entregable: Ficha del equipo: problema en 2-3 frases, 3-5 capacidades, 2-3 actores y lo que queda fuera de alcance</a:t>
             </a:r>
           </a:p>
           <a:p>
@@ -4262,7 +6305,7 @@
                 </a:solidFill>
                 <a:latin typeface="Calibri"/>
               </a:rPr>
-              <a:t>Siguiente clase: ciclos de vida del software</a:t>
+              <a:t>Siguiente clase: continuamos el hilo del PI</a:t>
             </a:r>
           </a:p>
         </p:txBody>
@@ -4297,7 +6340,7 @@
                 </a:solidFill>
                 <a:latin typeface="Calibri"/>
               </a:rPr>
-              <a:t>En esta materia ustedes son los arquitectos</a:t>
+              <a:t>Teoria al servicio del proyecto</a:t>
             </a:r>
           </a:p>
         </p:txBody>
@@ -4443,7 +6486,7 @@
                 </a:solidFill>
                 <a:latin typeface="Calibri"/>
               </a:rPr>
-              <a:t>Objetivos de la clase</a:t>
+              <a:t>Encuadre de hoy · Objetivo del PI</a:t>
             </a:r>
           </a:p>
         </p:txBody>
@@ -4482,7 +6525,7 @@
                 </a:solidFill>
                 <a:latin typeface="Calibri"/>
               </a:rPr>
-              <a:t>–   Distinguir </a:t>
+              <a:t>–   </a:t>
             </a:r>
             <a:r>
               <a:rPr sz="1600" b="1" i="0">
@@ -4491,7 +6534,7 @@
                 </a:solidFill>
                 <a:latin typeface="Calibri"/>
               </a:rPr>
-              <a:t>programar</a:t>
+              <a:t>Hoy avanzamos VetCare en:</a:t>
             </a:r>
             <a:r>
               <a:rPr sz="1600" b="0" i="0">
@@ -4500,25 +6543,7 @@
                 </a:solidFill>
                 <a:latin typeface="Calibri"/>
               </a:rPr>
-              <a:t> de </a:t>
-            </a:r>
-            <a:r>
-              <a:rPr sz="1600" b="1" i="0">
-                <a:solidFill>
-                  <a:srgbClr val="333333"/>
-                </a:solidFill>
-                <a:latin typeface="Calibri"/>
-              </a:rPr>
-              <a:t>hacer ingenieria de software</a:t>
-            </a:r>
-            <a:r>
-              <a:rPr sz="1600" b="0" i="0">
-                <a:solidFill>
-                  <a:srgbClr val="333333"/>
-                </a:solidFill>
-                <a:latin typeface="Calibri"/>
-              </a:rPr>
-              <a:t>.</a:t>
+              <a:t> Equipo conformado y dominio del proyecto acotado</a:t>
             </a:r>
           </a:p>
           <a:p>
@@ -4534,7 +6559,7 @@
                 </a:solidFill>
                 <a:latin typeface="Calibri"/>
               </a:rPr>
-              <a:t>–   Diferenciar </a:t>
+              <a:t>–   Herramienta: </a:t>
             </a:r>
             <a:r>
               <a:rPr sz="1600" b="1" i="0">
@@ -4543,7 +6568,7 @@
                 </a:solidFill>
                 <a:latin typeface="Calibri"/>
               </a:rPr>
-              <a:t>requisito funcional</a:t>
+              <a:t>Google Docs · draw.io</a:t>
             </a:r>
             <a:r>
               <a:rPr sz="1600" b="0" i="0">
@@ -4552,7 +6577,7 @@
                 </a:solidFill>
                 <a:latin typeface="Calibri"/>
               </a:rPr>
-              <a:t> y </a:t>
+              <a:t> · Bloque </a:t>
             </a:r>
             <a:r>
               <a:rPr sz="1600" b="1" i="0">
@@ -4561,16 +6586,7 @@
                 </a:solidFill>
                 <a:latin typeface="Calibri"/>
               </a:rPr>
-              <a:t>no funcional</a:t>
-            </a:r>
-            <a:r>
-              <a:rPr sz="1600" b="0" i="0">
-                <a:solidFill>
-                  <a:srgbClr val="333333"/>
-                </a:solidFill>
-                <a:latin typeface="Calibri"/>
-              </a:rPr>
-              <a:t>, y escribirlos de forma verificable.</a:t>
+              <a:t>120 min</a:t>
             </a:r>
           </a:p>
           <a:p>
@@ -4586,7 +6602,7 @@
                 </a:solidFill>
                 <a:latin typeface="Calibri"/>
               </a:rPr>
-              <a:t>–   Identificar a los </a:t>
+              <a:t>–   </a:t>
             </a:r>
             <a:r>
               <a:rPr sz="1600" b="1" i="0">
@@ -4595,7 +6611,7 @@
                 </a:solidFill>
                 <a:latin typeface="Calibri"/>
               </a:rPr>
-              <a:t>interesados</a:t>
+              <a:t>Entregable de hoy:</a:t>
             </a:r>
             <a:r>
               <a:rPr sz="1600" b="0" i="0">
@@ -4604,7 +6620,7 @@
                 </a:solidFill>
                 <a:latin typeface="Calibri"/>
               </a:rPr>
-              <a:t> de un sistema y sus intereses en conflicto.</a:t>
+              <a:t> Ficha del equipo: problema en 2-3 frases, 3-5 capacidades, 2-3 actores y lo que queda fuera de alcance</a:t>
             </a:r>
           </a:p>
           <a:p>
@@ -4620,25 +6636,7 @@
                 </a:solidFill>
                 <a:latin typeface="Calibri"/>
               </a:rPr>
-              <a:t>–   Conformar equipo y </a:t>
-            </a:r>
-            <a:r>
-              <a:rPr sz="1600" b="1" i="0">
-                <a:solidFill>
-                  <a:srgbClr val="333333"/>
-                </a:solidFill>
-                <a:latin typeface="Calibri"/>
-              </a:rPr>
-              <a:t>acotar el dominio</a:t>
-            </a:r>
-            <a:r>
-              <a:rPr sz="1600" b="0" i="0">
-                <a:solidFill>
-                  <a:srgbClr val="333333"/>
-                </a:solidFill>
-                <a:latin typeface="Calibri"/>
-              </a:rPr>
-              <a:t> del proyecto del semestre.</a:t>
+              <a:t>–   La teoria esta al servicio del producto: al salir, VetCare avanzo.</a:t>
             </a:r>
           </a:p>
         </p:txBody>
@@ -4942,7 +6940,7 @@
                 </a:solidFill>
                 <a:latin typeface="Calibri"/>
               </a:rPr>
-              <a:t>0-15</a:t>
+              <a:t>0-10</a:t>
             </a:r>
           </a:p>
         </p:txBody>
@@ -4977,7 +6975,7 @@
                 </a:solidFill>
                 <a:latin typeface="Calibri"/>
               </a:rPr>
-              <a:t>Encuadre del tema</a:t>
+              <a:t>Encuadre y repaso del avance</a:t>
             </a:r>
           </a:p>
         </p:txBody>
@@ -5057,7 +7055,7 @@
                 </a:solidFill>
                 <a:latin typeface="Calibri"/>
               </a:rPr>
-              <a:t>15-35</a:t>
+              <a:t>10-40</a:t>
             </a:r>
           </a:p>
         </p:txBody>
@@ -5092,7 +7090,7 @@
                 </a:solidFill>
                 <a:latin typeface="Calibri"/>
               </a:rPr>
-              <a:t>Prueba diagnostica (sin nota)</a:t>
+              <a:t>Teoria Core del tema de hoy</a:t>
             </a:r>
           </a:p>
         </p:txBody>
@@ -5172,7 +7170,7 @@
                 </a:solidFill>
                 <a:latin typeface="Calibri"/>
               </a:rPr>
-              <a:t>35-70</a:t>
+              <a:t>40-60</a:t>
             </a:r>
           </a:p>
         </p:txBody>
@@ -5207,7 +7205,7 @@
                 </a:solidFill>
                 <a:latin typeface="Calibri"/>
               </a:rPr>
-              <a:t>Teoria: conceptos iniciales</a:t>
+              <a:t>Demo en vivo sobre VetCare</a:t>
             </a:r>
           </a:p>
         </p:txBody>
@@ -5287,7 +7285,7 @@
                 </a:solidFill>
                 <a:latin typeface="Calibri"/>
               </a:rPr>
-              <a:t>70-100</a:t>
+              <a:t>60-105</a:t>
             </a:r>
           </a:p>
         </p:txBody>
@@ -5322,7 +7320,7 @@
                 </a:solidFill>
                 <a:latin typeface="Calibri"/>
               </a:rPr>
-              <a:t>Taller: equipo y dominio</a:t>
+              <a:t>Taller guiado = avance del PI</a:t>
             </a:r>
           </a:p>
         </p:txBody>
@@ -5402,7 +7400,7 @@
                 </a:solidFill>
                 <a:latin typeface="Calibri"/>
               </a:rPr>
-              <a:t>100-120</a:t>
+              <a:t>105-120</a:t>
             </a:r>
           </a:p>
         </p:txBody>
@@ -5437,7 +7435,7 @@
                 </a:solidFill>
                 <a:latin typeface="Calibri"/>
               </a:rPr>
-              <a:t>Puesta en comun y cierre</a:t>
+              <a:t>Criterios de exito y cierre</a:t>
             </a:r>
           </a:p>
         </p:txBody>
@@ -5565,7 +7563,7 @@
         <p:spPr>
           <a:xfrm>
             <a:off x="0" y="0"/>
-            <a:ext cx="12191695" cy="1170432"/>
+            <a:ext cx="12191695" cy="960120"/>
           </a:xfrm>
           <a:prstGeom prst="rect">
             <a:avLst/>
@@ -5607,7 +7605,7 @@
         </p:nvSpPr>
         <p:spPr>
           <a:xfrm>
-            <a:off x="0" y="1170432"/>
+            <a:off x="0" y="960120"/>
             <a:ext cx="12191695" cy="41148"/>
           </a:xfrm>
           <a:prstGeom prst="rect">
@@ -5651,7 +7649,7 @@
         <p:spPr>
           <a:xfrm>
             <a:off x="457200" y="164592"/>
-            <a:ext cx="11277295" cy="384048"/>
+            <a:ext cx="11277295" cy="502920"/>
           </a:xfrm>
           <a:prstGeom prst="rect">
             <a:avLst/>
@@ -5671,7 +7669,7 @@
                 </a:solidFill>
                 <a:latin typeface="Calibri"/>
               </a:rPr>
-              <a:t>Programar no es lo mismo que hacer ingenieria</a:t>
+              <a:t>Teoria Core</a:t>
             </a:r>
           </a:p>
         </p:txBody>
@@ -5684,164 +7682,8 @@
         </p:nvSpPr>
         <p:spPr>
           <a:xfrm>
-            <a:off x="457200" y="566928"/>
-            <a:ext cx="11277295" cy="411480"/>
-          </a:xfrm>
-          <a:prstGeom prst="rect">
-            <a:avLst/>
-          </a:prstGeom>
-          <a:noFill/>
-        </p:spPr>
-        <p:txBody>
-          <a:bodyPr wrap="square">
-            <a:spAutoFit/>
-          </a:bodyPr>
-          <a:lstStyle/>
-          <a:p>
-            <a:r>
-              <a:rPr sz="1400" b="0" i="0">
-                <a:solidFill>
-                  <a:srgbClr val="B8D8EE"/>
-                </a:solidFill>
-                <a:latin typeface="Calibri"/>
-              </a:rPr>
-              <a:t>La diferencia se paga en dinero: corregir un error tarde cuesta mucho mas que detectarlo temprano</a:t>
-            </a:r>
-          </a:p>
-        </p:txBody>
-      </p:sp>
-      <p:sp>
-        <p:nvSpPr>
-          <p:cNvPr id="6" name="Rounded Rectangle 5"/>
-          <p:cNvSpPr/>
-          <p:nvPr/>
-        </p:nvSpPr>
-        <p:spPr>
-          <a:xfrm>
-            <a:off x="457200" y="1426464"/>
-            <a:ext cx="5524347" cy="4928616"/>
-          </a:xfrm>
-          <a:prstGeom prst="roundRect">
-            <a:avLst>
-              <a:gd name="adj" fmla="val 12000"/>
-            </a:avLst>
-          </a:prstGeom>
-          <a:solidFill>
-            <a:srgbClr val="F2F2F2"/>
-          </a:solidFill>
-          <a:ln>
-            <a:noFill/>
-          </a:ln>
-        </p:spPr>
-        <p:style>
-          <a:lnRef idx="1">
-            <a:schemeClr val="accent1"/>
-          </a:lnRef>
-          <a:fillRef idx="3">
-            <a:schemeClr val="accent1"/>
-          </a:fillRef>
-          <a:effectRef idx="2">
-            <a:schemeClr val="accent1"/>
-          </a:effectRef>
-          <a:fontRef idx="minor">
-            <a:schemeClr val="lt1"/>
-          </a:fontRef>
-        </p:style>
-        <p:txBody>
-          <a:bodyPr rtlCol="0" anchor="ctr"/>
-          <a:lstStyle/>
-          <a:p>
-            <a:pPr algn="ctr"/>
-          </a:p>
-        </p:txBody>
-      </p:sp>
-      <p:sp>
-        <p:nvSpPr>
-          <p:cNvPr id="7" name="Rectangle 6"/>
-          <p:cNvSpPr/>
-          <p:nvPr/>
-        </p:nvSpPr>
-        <p:spPr>
-          <a:xfrm>
-            <a:off x="457200" y="1426464"/>
-            <a:ext cx="5524347" cy="73152"/>
-          </a:xfrm>
-          <a:prstGeom prst="rect">
-            <a:avLst/>
-          </a:prstGeom>
-          <a:solidFill>
-            <a:srgbClr val="095292"/>
-          </a:solidFill>
-          <a:ln>
-            <a:noFill/>
-          </a:ln>
-        </p:spPr>
-        <p:style>
-          <a:lnRef idx="1">
-            <a:schemeClr val="accent1"/>
-          </a:lnRef>
-          <a:fillRef idx="3">
-            <a:schemeClr val="accent1"/>
-          </a:fillRef>
-          <a:effectRef idx="2">
-            <a:schemeClr val="accent1"/>
-          </a:effectRef>
-          <a:fontRef idx="minor">
-            <a:schemeClr val="lt1"/>
-          </a:fontRef>
-        </p:style>
-        <p:txBody>
-          <a:bodyPr rtlCol="0" anchor="ctr"/>
-          <a:lstStyle/>
-          <a:p>
-            <a:pPr algn="ctr"/>
-          </a:p>
-        </p:txBody>
-      </p:sp>
-      <p:sp>
-        <p:nvSpPr>
-          <p:cNvPr id="8" name="TextBox 7"/>
-          <p:cNvSpPr txBox="1"/>
-          <p:nvPr/>
-        </p:nvSpPr>
-        <p:spPr>
-          <a:xfrm>
-            <a:off x="621792" y="1609344"/>
-            <a:ext cx="5195163" cy="365760"/>
-          </a:xfrm>
-          <a:prstGeom prst="rect">
-            <a:avLst/>
-          </a:prstGeom>
-          <a:noFill/>
-        </p:spPr>
-        <p:txBody>
-          <a:bodyPr wrap="square">
-            <a:spAutoFit/>
-          </a:bodyPr>
-          <a:lstStyle/>
-          <a:p>
-            <a:r>
-              <a:rPr sz="1600" b="1" i="0">
-                <a:solidFill>
-                  <a:srgbClr val="095292"/>
-                </a:solidFill>
-                <a:latin typeface="Calibri"/>
-              </a:rPr>
-              <a:t>Programar</a:t>
-            </a:r>
-          </a:p>
-        </p:txBody>
-      </p:sp>
-      <p:sp>
-        <p:nvSpPr>
-          <p:cNvPr id="9" name="TextBox 8"/>
-          <p:cNvSpPr txBox="1"/>
-          <p:nvPr/>
-        </p:nvSpPr>
-        <p:spPr>
-          <a:xfrm>
-            <a:off x="621792" y="2020824"/>
-            <a:ext cx="5195163" cy="4379976"/>
+            <a:off x="457200" y="1170432"/>
+            <a:ext cx="11277295" cy="5230368"/>
           </a:xfrm>
           <a:prstGeom prst="rect">
             <a:avLst/>
@@ -5866,25 +7708,7 @@
                 </a:solidFill>
                 <a:latin typeface="Calibri"/>
               </a:rPr>
-              <a:t>–   Escribir codigo que funcione </a:t>
-            </a:r>
-            <a:r>
-              <a:rPr sz="1500" b="1" i="0">
-                <a:solidFill>
-                  <a:srgbClr val="333333"/>
-                </a:solidFill>
-                <a:latin typeface="Calibri"/>
-              </a:rPr>
-              <a:t>hoy</a:t>
-            </a:r>
-            <a:r>
-              <a:rPr sz="1500" b="0" i="0">
-                <a:solidFill>
-                  <a:srgbClr val="333333"/>
-                </a:solidFill>
-                <a:latin typeface="Calibri"/>
-              </a:rPr>
-              <a:t>.</a:t>
+              <a:t>–   Programar es escribir codigo que funcione hoy</a:t>
             </a:r>
           </a:p>
           <a:p>
@@ -5900,7 +7724,7 @@
                 </a:solidFill>
                 <a:latin typeface="Calibri"/>
               </a:rPr>
-              <a:t>–   El exito es: «compila y corre».</a:t>
+              <a:t>–   Conviene separar dos palabras que se usan como sinonimos y no lo son</a:t>
             </a:r>
           </a:p>
           <a:p>
@@ -5916,154 +7740,9 @@
                 </a:solidFill>
                 <a:latin typeface="Calibri"/>
               </a:rPr>
-              <a:t>–   El alcance cabe en la cabeza de una persona.</a:t>
-            </a:r>
-          </a:p>
-        </p:txBody>
-      </p:sp>
-      <p:sp>
-        <p:nvSpPr>
-          <p:cNvPr id="10" name="Rounded Rectangle 9"/>
-          <p:cNvSpPr/>
-          <p:nvPr/>
-        </p:nvSpPr>
-        <p:spPr>
-          <a:xfrm>
-            <a:off x="6210147" y="1426464"/>
-            <a:ext cx="5524347" cy="4928616"/>
-          </a:xfrm>
-          <a:prstGeom prst="roundRect">
-            <a:avLst>
-              <a:gd name="adj" fmla="val 12000"/>
-            </a:avLst>
-          </a:prstGeom>
-          <a:solidFill>
-            <a:srgbClr val="E8F4FA"/>
-          </a:solidFill>
-          <a:ln>
-            <a:noFill/>
-          </a:ln>
-        </p:spPr>
-        <p:style>
-          <a:lnRef idx="1">
-            <a:schemeClr val="accent1"/>
-          </a:lnRef>
-          <a:fillRef idx="3">
-            <a:schemeClr val="accent1"/>
-          </a:fillRef>
-          <a:effectRef idx="2">
-            <a:schemeClr val="accent1"/>
-          </a:effectRef>
-          <a:fontRef idx="minor">
-            <a:schemeClr val="lt1"/>
-          </a:fontRef>
-        </p:style>
-        <p:txBody>
-          <a:bodyPr rtlCol="0" anchor="ctr"/>
-          <a:lstStyle/>
-          <a:p>
-            <a:pPr algn="ctr"/>
-          </a:p>
-        </p:txBody>
-      </p:sp>
-      <p:sp>
-        <p:nvSpPr>
-          <p:cNvPr id="11" name="Rectangle 10"/>
-          <p:cNvSpPr/>
-          <p:nvPr/>
-        </p:nvSpPr>
-        <p:spPr>
-          <a:xfrm>
-            <a:off x="6210147" y="1426464"/>
-            <a:ext cx="5524347" cy="73152"/>
-          </a:xfrm>
-          <a:prstGeom prst="rect">
-            <a:avLst/>
-          </a:prstGeom>
-          <a:solidFill>
-            <a:srgbClr val="269CCB"/>
-          </a:solidFill>
-          <a:ln>
-            <a:noFill/>
-          </a:ln>
-        </p:spPr>
-        <p:style>
-          <a:lnRef idx="1">
-            <a:schemeClr val="accent1"/>
-          </a:lnRef>
-          <a:fillRef idx="3">
-            <a:schemeClr val="accent1"/>
-          </a:fillRef>
-          <a:effectRef idx="2">
-            <a:schemeClr val="accent1"/>
-          </a:effectRef>
-          <a:fontRef idx="minor">
-            <a:schemeClr val="lt1"/>
-          </a:fontRef>
-        </p:style>
-        <p:txBody>
-          <a:bodyPr rtlCol="0" anchor="ctr"/>
-          <a:lstStyle/>
-          <a:p>
-            <a:pPr algn="ctr"/>
-          </a:p>
-        </p:txBody>
-      </p:sp>
-      <p:sp>
-        <p:nvSpPr>
-          <p:cNvPr id="12" name="TextBox 11"/>
-          <p:cNvSpPr txBox="1"/>
-          <p:nvPr/>
-        </p:nvSpPr>
-        <p:spPr>
-          <a:xfrm>
-            <a:off x="6374739" y="1609344"/>
-            <a:ext cx="5195163" cy="365760"/>
-          </a:xfrm>
-          <a:prstGeom prst="rect">
-            <a:avLst/>
-          </a:prstGeom>
-          <a:noFill/>
-        </p:spPr>
-        <p:txBody>
-          <a:bodyPr wrap="square">
-            <a:spAutoFit/>
-          </a:bodyPr>
-          <a:lstStyle/>
-          <a:p>
-            <a:r>
-              <a:rPr sz="1600" b="1" i="0">
-                <a:solidFill>
-                  <a:srgbClr val="095292"/>
-                </a:solidFill>
-                <a:latin typeface="Calibri"/>
-              </a:rPr>
-              <a:t>Ingenieria de software</a:t>
-            </a:r>
-          </a:p>
-        </p:txBody>
-      </p:sp>
-      <p:sp>
-        <p:nvSpPr>
-          <p:cNvPr id="13" name="TextBox 12"/>
-          <p:cNvSpPr txBox="1"/>
-          <p:nvPr/>
-        </p:nvSpPr>
-        <p:spPr>
-          <a:xfrm>
-            <a:off x="6374739" y="2020824"/>
-            <a:ext cx="5195163" cy="4379976"/>
-          </a:xfrm>
-          <a:prstGeom prst="rect">
-            <a:avLst/>
-          </a:prstGeom>
-          <a:noFill/>
-        </p:spPr>
-        <p:txBody>
-          <a:bodyPr wrap="square">
-            <a:spAutoFit/>
-          </a:bodyPr>
-          <a:lstStyle/>
+              <a:t>–   Un requisito funcional dice QUE debe hacer el sistema: «registrar una mascota con ID, nombre y especie». Un…</a:t>
+            </a:r>
+          </a:p>
           <a:p>
             <a:pPr>
               <a:spcAft>
@@ -6077,61 +7756,7 @@
                 </a:solidFill>
                 <a:latin typeface="Calibri"/>
               </a:rPr>
-              <a:t>–   Que siga funcionando cuando </a:t>
-            </a:r>
-            <a:r>
-              <a:rPr sz="1500" b="1" i="0">
-                <a:solidFill>
-                  <a:srgbClr val="333333"/>
-                </a:solidFill>
-                <a:latin typeface="Calibri"/>
-              </a:rPr>
-              <a:t>crece</a:t>
-            </a:r>
-            <a:r>
-              <a:rPr sz="1500" b="0" i="0">
-                <a:solidFill>
-                  <a:srgbClr val="333333"/>
-                </a:solidFill>
-                <a:latin typeface="Calibri"/>
-              </a:rPr>
-              <a:t>, cuando lo mantiene </a:t>
-            </a:r>
-            <a:r>
-              <a:rPr sz="1500" b="1" i="0">
-                <a:solidFill>
-                  <a:srgbClr val="333333"/>
-                </a:solidFill>
-                <a:latin typeface="Calibri"/>
-              </a:rPr>
-              <a:t>otra persona</a:t>
-            </a:r>
-            <a:r>
-              <a:rPr sz="1500" b="0" i="0">
-                <a:solidFill>
-                  <a:srgbClr val="333333"/>
-                </a:solidFill>
-                <a:latin typeface="Calibri"/>
-              </a:rPr>
-              <a:t> y cuando </a:t>
-            </a:r>
-            <a:r>
-              <a:rPr sz="1500" b="1" i="0">
-                <a:solidFill>
-                  <a:srgbClr val="333333"/>
-                </a:solidFill>
-                <a:latin typeface="Calibri"/>
-              </a:rPr>
-              <a:t>cambian</a:t>
-            </a:r>
-            <a:r>
-              <a:rPr sz="1500" b="0" i="0">
-                <a:solidFill>
-                  <a:srgbClr val="333333"/>
-                </a:solidFill>
-                <a:latin typeface="Calibri"/>
-              </a:rPr>
-              <a:t> los requisitos.</a:t>
+              <a:t>–   Los interesados no son solo quien paga</a:t>
             </a:r>
           </a:p>
           <a:p>
@@ -6147,7 +7772,7 @@
                 </a:solidFill>
                 <a:latin typeface="Calibri"/>
               </a:rPr>
-              <a:t>–   El exito es: se puede modificar sin romperlo.</a:t>
+              <a:t>–   Todo desarrollo pasa por las mismas fases —requisitos, diseño, construccion, pruebas, mantenimiento— y lo que…</a:t>
             </a:r>
           </a:p>
           <a:p>
@@ -6163,14 +7788,46 @@
                 </a:solidFill>
                 <a:latin typeface="Calibri"/>
               </a:rPr>
-              <a:t>–   El alcance excede a una sola persona → hacen falta planos.</a:t>
-            </a:r>
-          </a:p>
-        </p:txBody>
-      </p:sp>
-      <p:sp>
-        <p:nvSpPr>
-          <p:cNvPr id="14" name="TextBox 13"/>
+              <a:t>–   Queda una pregunta que el estudiante hace el primer dia y conviene responder sin rodeos: para que sirve documentar…</a:t>
+            </a:r>
+          </a:p>
+          <a:p>
+            <a:pPr>
+              <a:spcAft>
+                <a:spcPts val="800"/>
+              </a:spcAft>
+            </a:pPr>
+            <a:r>
+              <a:rPr sz="1500" b="0" i="0">
+                <a:solidFill>
+                  <a:srgbClr val="333333"/>
+                </a:solidFill>
+                <a:latin typeface="Calibri"/>
+              </a:rPr>
+              <a:t>–   Conviene tambien aclarar el mapa del semestre en una sola frase, porque de eso depende que el estudiante sepa…</a:t>
+            </a:r>
+          </a:p>
+          <a:p>
+            <a:pPr>
+              <a:spcAft>
+                <a:spcPts val="800"/>
+              </a:spcAft>
+            </a:pPr>
+            <a:r>
+              <a:rPr sz="1500" b="0" i="0">
+                <a:solidFill>
+                  <a:srgbClr val="333333"/>
+                </a:solidFill>
+                <a:latin typeface="Calibri"/>
+              </a:rPr>
+              <a:t>–   Error tipico del docente que no domina el tema: empezar por las metodologias (cascada, Scrum) antes de que el…</a:t>
+            </a:r>
+          </a:p>
+        </p:txBody>
+      </p:sp>
+      <p:sp>
+        <p:nvSpPr>
+          <p:cNvPr id="6" name="TextBox 5"/>
           <p:cNvSpPr txBox="1"/>
           <p:nvPr/>
         </p:nvSpPr>
@@ -6344,7 +8001,7 @@
                 </a:solidFill>
                 <a:latin typeface="Calibri"/>
               </a:rPr>
-              <a:t>El costo de un error crece con el tiempo</a:t>
+              <a:t>De frase cruda a requisito verificable</a:t>
             </a:r>
           </a:p>
         </p:txBody>
@@ -6357,8 +8014,8 @@
         </p:nvSpPr>
         <p:spPr>
           <a:xfrm>
-            <a:off x="822960" y="2743200"/>
-            <a:ext cx="2194560" cy="1005840"/>
+            <a:off x="457200" y="1261872"/>
+            <a:ext cx="11277295" cy="4773168"/>
           </a:xfrm>
           <a:prstGeom prst="roundRect">
             <a:avLst>
@@ -6366,7 +8023,7 @@
             </a:avLst>
           </a:prstGeom>
           <a:solidFill>
-            <a:srgbClr val="269CCB"/>
+            <a:srgbClr val="1E2A38"/>
           </a:solidFill>
           <a:ln>
             <a:noFill/>
@@ -6387,92 +8044,26 @@
           </a:fontRef>
         </p:style>
         <p:txBody>
-          <a:bodyPr rtlCol="0" anchor="ctr" wrap="square"/>
+          <a:bodyPr rtlCol="0" anchor="ctr"/>
           <a:lstStyle/>
           <a:p>
             <a:pPr algn="ctr"/>
-            <a:r>
-              <a:rPr sz="1300" b="1" i="0">
-                <a:solidFill>
-                  <a:srgbClr val="FFFFFF"/>
-                </a:solidFill>
-                <a:latin typeface="Calibri"/>
-              </a:rPr>
-              <a:t>Requisitos
-(barato)</a:t>
-            </a:r>
-          </a:p>
-        </p:txBody>
-      </p:sp>
-      <p:sp>
-        <p:nvSpPr>
-          <p:cNvPr id="6" name="Rounded Rectangle 5"/>
+          </a:p>
+        </p:txBody>
+      </p:sp>
+      <p:sp>
+        <p:nvSpPr>
+          <p:cNvPr id="6" name="Rectangle 5"/>
           <p:cNvSpPr/>
           <p:nvPr/>
         </p:nvSpPr>
         <p:spPr>
           <a:xfrm>
-            <a:off x="3657600" y="2743200"/>
-            <a:ext cx="2194560" cy="1005840"/>
-          </a:xfrm>
-          <a:prstGeom prst="roundRect">
-            <a:avLst>
-              <a:gd name="adj" fmla="val 12000"/>
-            </a:avLst>
-          </a:prstGeom>
-          <a:solidFill>
-            <a:srgbClr val="269CCB"/>
-          </a:solidFill>
-          <a:ln>
-            <a:noFill/>
-          </a:ln>
-        </p:spPr>
-        <p:style>
-          <a:lnRef idx="1">
-            <a:schemeClr val="accent1"/>
-          </a:lnRef>
-          <a:fillRef idx="3">
-            <a:schemeClr val="accent1"/>
-          </a:fillRef>
-          <a:effectRef idx="2">
-            <a:schemeClr val="accent1"/>
-          </a:effectRef>
-          <a:fontRef idx="minor">
-            <a:schemeClr val="lt1"/>
-          </a:fontRef>
-        </p:style>
-        <p:txBody>
-          <a:bodyPr rtlCol="0" anchor="ctr" wrap="square"/>
-          <a:lstStyle/>
-          <a:p>
-            <a:pPr algn="ctr"/>
-            <a:r>
-              <a:rPr sz="1300" b="1" i="0">
-                <a:solidFill>
-                  <a:srgbClr val="FFFFFF"/>
-                </a:solidFill>
-                <a:latin typeface="Calibri"/>
-              </a:rPr>
-              <a:t>Diseño</a:t>
-            </a:r>
-          </a:p>
-        </p:txBody>
-      </p:sp>
-      <p:sp>
-        <p:nvSpPr>
-          <p:cNvPr id="7" name="Rounded Rectangle 6"/>
-          <p:cNvSpPr/>
-          <p:nvPr/>
-        </p:nvSpPr>
-        <p:spPr>
-          <a:xfrm>
-            <a:off x="6492240" y="2743200"/>
-            <a:ext cx="2194560" cy="1005840"/>
-          </a:xfrm>
-          <a:prstGeom prst="roundRect">
-            <a:avLst>
-              <a:gd name="adj" fmla="val 12000"/>
-            </a:avLst>
+            <a:off x="457200" y="1261872"/>
+            <a:ext cx="11277295" cy="320040"/>
+          </a:xfrm>
+          <a:prstGeom prst="rect">
+            <a:avLst/>
           </a:prstGeom>
           <a:solidFill>
             <a:srgbClr val="095292"/>
@@ -6496,195 +8087,55 @@
           </a:fontRef>
         </p:style>
         <p:txBody>
-          <a:bodyPr rtlCol="0" anchor="ctr" wrap="square"/>
+          <a:bodyPr rtlCol="0" anchor="ctr"/>
           <a:lstStyle/>
           <a:p>
             <a:pPr algn="ctr"/>
-            <a:r>
-              <a:rPr sz="1300" b="1" i="0">
-                <a:solidFill>
-                  <a:srgbClr val="FFFFFF"/>
-                </a:solidFill>
-                <a:latin typeface="Calibri"/>
-              </a:rPr>
-              <a:t>Construccion</a:t>
-            </a:r>
-          </a:p>
-        </p:txBody>
-      </p:sp>
-      <p:sp>
-        <p:nvSpPr>
-          <p:cNvPr id="8" name="Rounded Rectangle 7"/>
-          <p:cNvSpPr/>
-          <p:nvPr/>
-        </p:nvSpPr>
-        <p:spPr>
-          <a:xfrm>
-            <a:off x="9326880" y="2743200"/>
-            <a:ext cx="2194560" cy="1005840"/>
-          </a:xfrm>
-          <a:prstGeom prst="roundRect">
-            <a:avLst>
-              <a:gd name="adj" fmla="val 12000"/>
-            </a:avLst>
-          </a:prstGeom>
-          <a:solidFill>
-            <a:srgbClr val="FFD000"/>
-          </a:solidFill>
-          <a:ln>
-            <a:noFill/>
-          </a:ln>
-        </p:spPr>
-        <p:style>
-          <a:lnRef idx="1">
-            <a:schemeClr val="accent1"/>
-          </a:lnRef>
-          <a:fillRef idx="3">
-            <a:schemeClr val="accent1"/>
-          </a:fillRef>
-          <a:effectRef idx="2">
-            <a:schemeClr val="accent1"/>
-          </a:effectRef>
-          <a:fontRef idx="minor">
-            <a:schemeClr val="lt1"/>
-          </a:fontRef>
-        </p:style>
-        <p:txBody>
-          <a:bodyPr rtlCol="0" anchor="ctr" wrap="square"/>
-          <a:lstStyle/>
-          <a:p>
-            <a:pPr algn="ctr"/>
-            <a:r>
-              <a:rPr sz="1300" b="1" i="0">
-                <a:solidFill>
-                  <a:srgbClr val="095292"/>
-                </a:solidFill>
-                <a:latin typeface="Calibri"/>
-              </a:rPr>
-              <a:t>Produccion
-(carisimo)</a:t>
-            </a:r>
-          </a:p>
-        </p:txBody>
-      </p:sp>
-      <p:cxnSp>
-        <p:nvCxnSpPr>
-          <p:cNvPr id="9" name="Connector 8"/>
-          <p:cNvCxnSpPr/>
-          <p:nvPr/>
-        </p:nvCxnSpPr>
-        <p:spPr>
-          <a:xfrm>
-            <a:off x="3017520" y="3246120"/>
-            <a:ext cx="640080" cy="0"/>
-          </a:xfrm>
-          <a:prstGeom prst="line">
-            <a:avLst/>
-          </a:prstGeom>
-          <a:ln w="22225">
-            <a:solidFill>
-              <a:srgbClr val="666666"/>
-            </a:solidFill>
-            <a:tailEnd type="triangle" w="med" len="med"/>
-          </a:ln>
-        </p:spPr>
-        <p:style>
-          <a:lnRef idx="2">
-            <a:schemeClr val="accent1"/>
-          </a:lnRef>
-          <a:fillRef idx="0">
-            <a:schemeClr val="accent1"/>
-          </a:fillRef>
-          <a:effectRef idx="1">
-            <a:schemeClr val="accent1"/>
-          </a:effectRef>
-          <a:fontRef idx="minor">
-            <a:schemeClr val="tx1"/>
-          </a:fontRef>
-        </p:style>
-      </p:cxnSp>
-      <p:cxnSp>
-        <p:nvCxnSpPr>
-          <p:cNvPr id="10" name="Connector 9"/>
-          <p:cNvCxnSpPr/>
-          <p:nvPr/>
-        </p:nvCxnSpPr>
-        <p:spPr>
-          <a:xfrm>
-            <a:off x="5852160" y="3246120"/>
-            <a:ext cx="640080" cy="0"/>
-          </a:xfrm>
-          <a:prstGeom prst="line">
-            <a:avLst/>
-          </a:prstGeom>
-          <a:ln w="22225">
-            <a:solidFill>
-              <a:srgbClr val="666666"/>
-            </a:solidFill>
-            <a:tailEnd type="triangle" w="med" len="med"/>
-          </a:ln>
-        </p:spPr>
-        <p:style>
-          <a:lnRef idx="2">
-            <a:schemeClr val="accent1"/>
-          </a:lnRef>
-          <a:fillRef idx="0">
-            <a:schemeClr val="accent1"/>
-          </a:fillRef>
-          <a:effectRef idx="1">
-            <a:schemeClr val="accent1"/>
-          </a:effectRef>
-          <a:fontRef idx="minor">
-            <a:schemeClr val="tx1"/>
-          </a:fontRef>
-        </p:style>
-      </p:cxnSp>
-      <p:cxnSp>
-        <p:nvCxnSpPr>
-          <p:cNvPr id="11" name="Connector 10"/>
-          <p:cNvCxnSpPr/>
-          <p:nvPr/>
-        </p:nvCxnSpPr>
-        <p:spPr>
-          <a:xfrm>
-            <a:off x="8686800" y="3246120"/>
-            <a:ext cx="640080" cy="0"/>
-          </a:xfrm>
-          <a:prstGeom prst="line">
-            <a:avLst/>
-          </a:prstGeom>
-          <a:ln w="22225">
-            <a:solidFill>
-              <a:srgbClr val="666666"/>
-            </a:solidFill>
-            <a:tailEnd type="triangle" w="med" len="med"/>
-          </a:ln>
-        </p:spPr>
-        <p:style>
-          <a:lnRef idx="2">
-            <a:schemeClr val="accent1"/>
-          </a:lnRef>
-          <a:fillRef idx="0">
-            <a:schemeClr val="accent1"/>
-          </a:fillRef>
-          <a:effectRef idx="1">
-            <a:schemeClr val="accent1"/>
-          </a:effectRef>
-          <a:fontRef idx="minor">
-            <a:schemeClr val="tx1"/>
-          </a:fontRef>
-        </p:style>
-      </p:cxnSp>
-      <p:sp>
-        <p:nvSpPr>
-          <p:cNvPr id="12" name="TextBox 11"/>
+          </a:p>
+        </p:txBody>
+      </p:sp>
+      <p:sp>
+        <p:nvSpPr>
+          <p:cNvPr id="7" name="TextBox 6"/>
           <p:cNvSpPr txBox="1"/>
           <p:nvPr/>
         </p:nvSpPr>
         <p:spPr>
           <a:xfrm>
-            <a:off x="457200" y="6263640"/>
-            <a:ext cx="11277295" cy="411480"/>
+            <a:off x="685800" y="1307592"/>
+            <a:ext cx="10820095" cy="256032"/>
+          </a:xfrm>
+          <a:prstGeom prst="rect">
+            <a:avLst/>
+          </a:prstGeom>
+          <a:noFill/>
+        </p:spPr>
+        <p:txBody>
+          <a:bodyPr wrap="square" anchor="ctr"/>
+          <a:lstStyle/>
+          <a:p>
+            <a:r>
+              <a:rPr sz="1000" b="1" i="0">
+                <a:solidFill>
+                  <a:srgbClr val="269CCB"/>
+                </a:solidFill>
+                <a:latin typeface="Calibri"/>
+              </a:rPr>
+              <a:t>● ● ●</a:t>
+            </a:r>
+          </a:p>
+        </p:txBody>
+      </p:sp>
+      <p:sp>
+        <p:nvSpPr>
+          <p:cNvPr id="8" name="TextBox 7"/>
+          <p:cNvSpPr txBox="1"/>
+          <p:nvPr/>
+        </p:nvSpPr>
+        <p:spPr>
+          <a:xfrm>
+            <a:off x="777240" y="1719072"/>
+            <a:ext cx="10637215" cy="4133087"/>
           </a:xfrm>
           <a:prstGeom prst="rect">
             <a:avLst/>
@@ -6697,21 +8148,237 @@
           </a:bodyPr>
           <a:lstStyle/>
           <a:p>
-            <a:r>
-              <a:rPr sz="1100" b="0" i="1">
+            <a:pPr>
+              <a:spcAft>
+                <a:spcPts val="400"/>
+              </a:spcAft>
+            </a:pPr>
+            <a:r>
+              <a:rPr sz="1400" b="0" i="0">
+                <a:solidFill>
+                  <a:srgbClr val="FFFFFF"/>
+                </a:solidFill>
+                <a:latin typeface="Calibri"/>
+              </a:rPr>
+              <a:t>FRASE DEL CLIENTE (entrevista):</a:t>
+            </a:r>
+          </a:p>
+          <a:p>
+            <a:pPr>
+              <a:spcAft>
+                <a:spcPts val="400"/>
+              </a:spcAft>
+            </a:pPr>
+            <a:r>
+              <a:rPr sz="1400" b="0" i="0">
+                <a:solidFill>
+                  <a:srgbClr val="FFFFFF"/>
+                </a:solidFill>
+                <a:latin typeface="Calibri"/>
+              </a:rPr>
+              <a:t>  "Necesito buscar rapido el expediente de un animal usando solo su ID."</a:t>
+            </a:r>
+          </a:p>
+          <a:p>
+            <a:pPr>
+              <a:spcAft>
+                <a:spcPts val="400"/>
+              </a:spcAft>
+            </a:pPr>
+            <a:r>
+              <a:rPr sz="1400" b="0" i="0">
+                <a:solidFill>
+                  <a:srgbClr val="FFFFFF"/>
+                </a:solidFill>
+                <a:latin typeface="Calibri"/>
+              </a:rPr>
+              <a:t/>
+            </a:r>
+          </a:p>
+          <a:p>
+            <a:pPr>
+              <a:spcAft>
+                <a:spcPts val="400"/>
+              </a:spcAft>
+            </a:pPr>
+            <a:r>
+              <a:rPr sz="1400" b="0" i="0">
+                <a:solidFill>
+                  <a:srgbClr val="FFFFFF"/>
+                </a:solidFill>
+                <a:latin typeface="Calibri"/>
+              </a:rPr>
+              <a:t>RF-01  Buscar expediente por identificador</a:t>
+            </a:r>
+          </a:p>
+          <a:p>
+            <a:pPr>
+              <a:spcAft>
+                <a:spcPts val="400"/>
+              </a:spcAft>
+            </a:pPr>
+            <a:r>
+              <a:rPr sz="1400" b="0" i="0">
+                <a:solidFill>
+                  <a:srgbClr val="FFFFFF"/>
+                </a:solidFill>
+                <a:latin typeface="Calibri"/>
+              </a:rPr>
+              <a:t>  El sistema permite consultar la ficha completa de una mascota</a:t>
+            </a:r>
+          </a:p>
+          <a:p>
+            <a:pPr>
+              <a:spcAft>
+                <a:spcPts val="400"/>
+              </a:spcAft>
+            </a:pPr>
+            <a:r>
+              <a:rPr sz="1400" b="0" i="0">
+                <a:solidFill>
+                  <a:srgbClr val="FFFFFF"/>
+                </a:solidFill>
+                <a:latin typeface="Calibri"/>
+              </a:rPr>
+              <a:t>  a partir de su identificador unico.</a:t>
+            </a:r>
+          </a:p>
+          <a:p>
+            <a:pPr>
+              <a:spcAft>
+                <a:spcPts val="400"/>
+              </a:spcAft>
+            </a:pPr>
+            <a:r>
+              <a:rPr sz="1400" b="0" i="0">
+                <a:solidFill>
+                  <a:srgbClr val="FFFFFF"/>
+                </a:solidFill>
+                <a:latin typeface="Calibri"/>
+              </a:rPr>
+              <a:t>  Actor: Recepcionista, Veterinario</a:t>
+            </a:r>
+          </a:p>
+          <a:p>
+            <a:pPr>
+              <a:spcAft>
+                <a:spcPts val="400"/>
+              </a:spcAft>
+            </a:pPr>
+            <a:r>
+              <a:rPr sz="1400" b="0" i="0">
+                <a:solidFill>
+                  <a:srgbClr val="FFFFFF"/>
+                </a:solidFill>
+                <a:latin typeface="Calibri"/>
+              </a:rPr>
+              <a:t/>
+            </a:r>
+          </a:p>
+          <a:p>
+            <a:pPr>
+              <a:spcAft>
+                <a:spcPts val="400"/>
+              </a:spcAft>
+            </a:pPr>
+            <a:r>
+              <a:rPr sz="1400" b="0" i="0">
+                <a:solidFill>
+                  <a:srgbClr val="FFFFFF"/>
+                </a:solidFill>
+                <a:latin typeface="Calibri"/>
+              </a:rPr>
+              <a:t>RNF-01 Tiempo de respuesta de la busqueda</a:t>
+            </a:r>
+          </a:p>
+          <a:p>
+            <a:pPr>
+              <a:spcAft>
+                <a:spcPts val="400"/>
+              </a:spcAft>
+            </a:pPr>
+            <a:r>
+              <a:rPr sz="1400" b="0" i="0">
+                <a:solidFill>
+                  <a:srgbClr val="FFFFFF"/>
+                </a:solidFill>
+                <a:latin typeface="Calibri"/>
+              </a:rPr>
+              <a:t>  La consulta del RF-01 devuelve el resultado en menos de 2 segundos</a:t>
+            </a:r>
+          </a:p>
+          <a:p>
+            <a:pPr>
+              <a:spcAft>
+                <a:spcPts val="400"/>
+              </a:spcAft>
+            </a:pPr>
+            <a:r>
+              <a:rPr sz="1400" b="0" i="0">
+                <a:solidFill>
+                  <a:srgbClr val="FFFFFF"/>
+                </a:solidFill>
+                <a:latin typeface="Calibri"/>
+              </a:rPr>
+              <a:t>  con hasta 500 mascotas registradas.</a:t>
+            </a:r>
+          </a:p>
+          <a:p>
+            <a:pPr>
+              <a:spcAft>
+                <a:spcPts val="400"/>
+              </a:spcAft>
+            </a:pPr>
+            <a:r>
+              <a:rPr sz="1400" b="0" i="0">
+                <a:solidFill>
+                  <a:srgbClr val="FFFFFF"/>
+                </a:solidFill>
+                <a:latin typeface="Calibri"/>
+              </a:rPr>
+              <a:t>  Verificacion: medir con cronometro sobre el juego de datos de prueba.</a:t>
+            </a:r>
+          </a:p>
+        </p:txBody>
+      </p:sp>
+      <p:sp>
+        <p:nvSpPr>
+          <p:cNvPr id="9" name="TextBox 8"/>
+          <p:cNvSpPr txBox="1"/>
+          <p:nvPr/>
+        </p:nvSpPr>
+        <p:spPr>
+          <a:xfrm>
+            <a:off x="457200" y="6080760"/>
+            <a:ext cx="11277295" cy="320040"/>
+          </a:xfrm>
+          <a:prstGeom prst="rect">
+            <a:avLst/>
+          </a:prstGeom>
+          <a:noFill/>
+        </p:spPr>
+        <p:txBody>
+          <a:bodyPr wrap="square">
+            <a:spAutoFit/>
+          </a:bodyPr>
+          <a:lstStyle/>
+          <a:p>
+            <a:pPr algn="ctr"/>
+            <a:r>
+              <a:rPr sz="1200" b="0" i="1">
                 <a:solidFill>
                   <a:srgbClr val="666666"/>
                 </a:solidFill>
                 <a:latin typeface="Calibri"/>
               </a:rPr>
-              <a:t>Por eso existe todo lo que veremos este semestre: mover la deteccion de errores hacia la izquierda de esta linea.</a:t>
-            </a:r>
-          </a:p>
-        </p:txBody>
-      </p:sp>
-      <p:sp>
-        <p:nvSpPr>
-          <p:cNvPr id="13" name="TextBox 12"/>
+              <a:t>Si no se puede verificar, no es un requisito: es un deseo.</a:t>
+            </a:r>
+          </a:p>
+        </p:txBody>
+      </p:sp>
+      <p:sp>
+        <p:nvSpPr>
+          <p:cNvPr id="10" name="TextBox 9"/>
           <p:cNvSpPr txBox="1"/>
           <p:nvPr/>
         </p:nvSpPr>
@@ -6885,7 +8552,7 @@
                 </a:solidFill>
                 <a:latin typeface="Calibri"/>
               </a:rPr>
-              <a:t>Requisitos: funcionales vs no funcionales</a:t>
+              <a:t>Demo del dia</a:t>
             </a:r>
           </a:p>
         </p:txBody>
@@ -6918,7 +8585,7 @@
               </a:spcAft>
             </a:pPr>
             <a:r>
-              <a:rPr sz="1500" b="0" i="0">
+              <a:rPr sz="1600" b="0" i="0">
                 <a:solidFill>
                   <a:srgbClr val="333333"/>
                 </a:solidFill>
@@ -6927,22 +8594,22 @@
               <a:t>–   </a:t>
             </a:r>
             <a:r>
-              <a:rPr sz="1500" b="1" i="0">
+              <a:rPr sz="1600" b="1" i="0">
                 <a:solidFill>
                   <a:srgbClr val="333333"/>
                 </a:solidFill>
                 <a:latin typeface="Calibri"/>
               </a:rPr>
-              <a:t>Funcional (QUE hace):</a:t>
-            </a:r>
-            <a:r>
-              <a:rPr sz="1500" b="0" i="0">
+              <a:t>Herramienta:</a:t>
+            </a:r>
+            <a:r>
+              <a:rPr sz="1600" b="0" i="0">
                 <a:solidFill>
                   <a:srgbClr val="333333"/>
                 </a:solidFill>
                 <a:latin typeface="Calibri"/>
               </a:rPr>
-              <a:t> «registrar una mascota con ID, nombre y especie».</a:t>
+              <a:t> Google Docs · draw.io</a:t>
             </a:r>
           </a:p>
           <a:p>
@@ -6952,7 +8619,7 @@
               </a:spcAft>
             </a:pPr>
             <a:r>
-              <a:rPr sz="1500" b="0" i="0">
+              <a:rPr sz="1600" b="0" i="0">
                 <a:solidFill>
                   <a:srgbClr val="333333"/>
                 </a:solidFill>
@@ -6961,22 +8628,22 @@
               <a:t>–   </a:t>
             </a:r>
             <a:r>
-              <a:rPr sz="1500" b="1" i="0">
+              <a:rPr sz="1600" b="1" i="0">
                 <a:solidFill>
                   <a:srgbClr val="333333"/>
                 </a:solidFill>
                 <a:latin typeface="Calibri"/>
               </a:rPr>
-              <a:t>No funcional (COMO se comporta):</a:t>
-            </a:r>
-            <a:r>
-              <a:rPr sz="1500" b="0" i="0">
+              <a:t>Demo:</a:t>
+            </a:r>
+            <a:r>
+              <a:rPr sz="1600" b="0" i="0">
                 <a:solidFill>
                   <a:srgbClr val="333333"/>
                 </a:solidFill>
                 <a:latin typeface="Calibri"/>
               </a:rPr>
-              <a:t> «la busqueda responde en menos de 2 segundos»; «la informacion no se pierde ante un corte de energia».</a:t>
+              <a:t> Convertir en vivo la frase cruda «necesito buscar rapido el expediente de un animal» en un requisito funcional y uno no funcional bien escritos</a:t>
             </a:r>
           </a:p>
           <a:p>
@@ -6986,83 +8653,13 @@
               </a:spcAft>
             </a:pPr>
             <a:r>
-              <a:rPr sz="1500" b="0" i="0">
+              <a:rPr sz="1600" b="0" i="0">
                 <a:solidFill>
                   <a:srgbClr val="333333"/>
                 </a:solidFill>
                 <a:latin typeface="Calibri"/>
               </a:rPr>
-              <a:t>–   Los </a:t>
-            </a:r>
-            <a:r>
-              <a:rPr sz="1500" b="1" i="0">
-                <a:solidFill>
-                  <a:srgbClr val="333333"/>
-                </a:solidFill>
-                <a:latin typeface="Calibri"/>
-              </a:rPr>
-              <a:t>no funcionales</a:t>
-            </a:r>
-            <a:r>
-              <a:rPr sz="1500" b="0" i="0">
-                <a:solidFill>
-                  <a:srgbClr val="333333"/>
-                </a:solidFill>
-                <a:latin typeface="Calibri"/>
-              </a:rPr>
-              <a:t> son los que mas se olvidan y los que mas condicionan el diseño.</a:t>
-            </a:r>
-          </a:p>
-          <a:p>
-            <a:pPr>
-              <a:spcAft>
-                <a:spcPts val="800"/>
-              </a:spcAft>
-            </a:pPr>
-            <a:r>
-              <a:rPr sz="1500" b="0" i="0">
-                <a:solidFill>
-                  <a:srgbClr val="333333"/>
-                </a:solidFill>
-                <a:latin typeface="Calibri"/>
-              </a:rPr>
-              <a:t>–   </a:t>
-            </a:r>
-            <a:r>
-              <a:rPr sz="1500" b="1" i="0">
-                <a:solidFill>
-                  <a:srgbClr val="333333"/>
-                </a:solidFill>
-                <a:latin typeface="Calibri"/>
-              </a:rPr>
-              <a:t>Regla practica:</a:t>
-            </a:r>
-            <a:r>
-              <a:rPr sz="1500" b="0" i="0">
-                <a:solidFill>
-                  <a:srgbClr val="333333"/>
-                </a:solidFill>
-                <a:latin typeface="Calibri"/>
-              </a:rPr>
-              <a:t> si no se puede </a:t>
-            </a:r>
-            <a:r>
-              <a:rPr sz="1500" b="1" i="0">
-                <a:solidFill>
-                  <a:srgbClr val="333333"/>
-                </a:solidFill>
-                <a:latin typeface="Calibri"/>
-              </a:rPr>
-              <a:t>verificar</a:t>
-            </a:r>
-            <a:r>
-              <a:rPr sz="1500" b="0" i="0">
-                <a:solidFill>
-                  <a:srgbClr val="333333"/>
-                </a:solidFill>
-                <a:latin typeface="Calibri"/>
-              </a:rPr>
-              <a:t>, no es un requisito — es un deseo. «Debe ser rapido» no sirve; «responde en &lt;2 s con 50 usuarios» si.</a:t>
+              <a:t>–   Mismo dominio VetCare — no otro ejemplo. Aqui se diseña, no se programa.</a:t>
             </a:r>
           </a:p>
         </p:txBody>
@@ -7137,7 +8734,7 @@
         <p:spPr>
           <a:xfrm>
             <a:off x="0" y="0"/>
-            <a:ext cx="12191695" cy="960120"/>
+            <a:ext cx="12191695" cy="1170432"/>
           </a:xfrm>
           <a:prstGeom prst="rect">
             <a:avLst/>
@@ -7179,7 +8776,7 @@
         </p:nvSpPr>
         <p:spPr>
           <a:xfrm>
-            <a:off x="0" y="960120"/>
+            <a:off x="0" y="1170432"/>
             <a:ext cx="12191695" cy="41148"/>
           </a:xfrm>
           <a:prstGeom prst="rect">
@@ -7223,7 +8820,7 @@
         <p:spPr>
           <a:xfrm>
             <a:off x="457200" y="164592"/>
-            <a:ext cx="11277295" cy="502920"/>
+            <a:ext cx="11277295" cy="384048"/>
           </a:xfrm>
           <a:prstGeom prst="rect">
             <a:avLst/>
@@ -7243,7 +8840,7 @@
                 </a:solidFill>
                 <a:latin typeface="Calibri"/>
               </a:rPr>
-              <a:t>Interesados: no solo el que paga</a:t>
+              <a:t>Herramientas de hoy</a:t>
             </a:r>
           </a:p>
         </p:txBody>
@@ -7256,8 +8853,8 @@
         </p:nvSpPr>
         <p:spPr>
           <a:xfrm>
-            <a:off x="457200" y="1170432"/>
-            <a:ext cx="11277295" cy="5230368"/>
+            <a:off x="457200" y="566928"/>
+            <a:ext cx="11277295" cy="411480"/>
           </a:xfrm>
           <a:prstGeom prst="rect">
             <a:avLst/>
@@ -7270,146 +8867,633 @@
           </a:bodyPr>
           <a:lstStyle/>
           <a:p>
-            <a:pPr>
-              <a:spcAft>
-                <a:spcPts val="800"/>
-              </a:spcAft>
+            <a:r>
+              <a:rPr sz="1400" b="0" i="0">
+                <a:solidFill>
+                  <a:srgbClr val="B8D8EE"/>
+                </a:solidFill>
+                <a:latin typeface="Calibri"/>
+              </a:rPr>
+              <a:t>Gratis · funcionan en el navegador</a:t>
+            </a:r>
+          </a:p>
+        </p:txBody>
+      </p:sp>
+      <p:sp>
+        <p:nvSpPr>
+          <p:cNvPr id="6" name="Rounded Rectangle 5"/>
+          <p:cNvSpPr/>
+          <p:nvPr/>
+        </p:nvSpPr>
+        <p:spPr>
+          <a:xfrm>
+            <a:off x="457200" y="1591056"/>
+            <a:ext cx="3624986" cy="2331720"/>
+          </a:xfrm>
+          <a:prstGeom prst="roundRect">
+            <a:avLst>
+              <a:gd name="adj" fmla="val 12000"/>
+            </a:avLst>
+          </a:prstGeom>
+          <a:solidFill>
+            <a:srgbClr val="F2F2F2"/>
+          </a:solidFill>
+          <a:ln>
+            <a:noFill/>
+          </a:ln>
+        </p:spPr>
+        <p:style>
+          <a:lnRef idx="1">
+            <a:schemeClr val="accent1"/>
+          </a:lnRef>
+          <a:fillRef idx="3">
+            <a:schemeClr val="accent1"/>
+          </a:fillRef>
+          <a:effectRef idx="2">
+            <a:schemeClr val="accent1"/>
+          </a:effectRef>
+          <a:fontRef idx="minor">
+            <a:schemeClr val="lt1"/>
+          </a:fontRef>
+        </p:style>
+        <p:txBody>
+          <a:bodyPr rtlCol="0" anchor="ctr"/>
+          <a:lstStyle/>
+          <a:p>
+            <a:pPr algn="ctr"/>
+          </a:p>
+        </p:txBody>
+      </p:sp>
+      <p:sp>
+        <p:nvSpPr>
+          <p:cNvPr id="7" name="Rectangle 6"/>
+          <p:cNvSpPr/>
+          <p:nvPr/>
+        </p:nvSpPr>
+        <p:spPr>
+          <a:xfrm>
+            <a:off x="457200" y="1591056"/>
+            <a:ext cx="3624986" cy="64008"/>
+          </a:xfrm>
+          <a:prstGeom prst="rect">
+            <a:avLst/>
+          </a:prstGeom>
+          <a:solidFill>
+            <a:srgbClr val="095292"/>
+          </a:solidFill>
+          <a:ln>
+            <a:noFill/>
+          </a:ln>
+        </p:spPr>
+        <p:style>
+          <a:lnRef idx="1">
+            <a:schemeClr val="accent1"/>
+          </a:lnRef>
+          <a:fillRef idx="3">
+            <a:schemeClr val="accent1"/>
+          </a:fillRef>
+          <a:effectRef idx="2">
+            <a:schemeClr val="accent1"/>
+          </a:effectRef>
+          <a:fontRef idx="minor">
+            <a:schemeClr val="lt1"/>
+          </a:fontRef>
+        </p:style>
+        <p:txBody>
+          <a:bodyPr rtlCol="0" anchor="ctr"/>
+          <a:lstStyle/>
+          <a:p>
+            <a:pPr algn="ctr"/>
+          </a:p>
+        </p:txBody>
+      </p:sp>
+      <p:sp>
+        <p:nvSpPr>
+          <p:cNvPr id="8" name="Rectangle 7"/>
+          <p:cNvSpPr/>
+          <p:nvPr/>
+        </p:nvSpPr>
+        <p:spPr>
+          <a:xfrm>
+            <a:off x="457200" y="1655064"/>
+            <a:ext cx="3624986" cy="27432"/>
+          </a:xfrm>
+          <a:prstGeom prst="rect">
+            <a:avLst/>
+          </a:prstGeom>
+          <a:solidFill>
+            <a:srgbClr val="FFD000"/>
+          </a:solidFill>
+          <a:ln>
+            <a:noFill/>
+          </a:ln>
+        </p:spPr>
+        <p:style>
+          <a:lnRef idx="1">
+            <a:schemeClr val="accent1"/>
+          </a:lnRef>
+          <a:fillRef idx="3">
+            <a:schemeClr val="accent1"/>
+          </a:fillRef>
+          <a:effectRef idx="2">
+            <a:schemeClr val="accent1"/>
+          </a:effectRef>
+          <a:fontRef idx="minor">
+            <a:schemeClr val="lt1"/>
+          </a:fontRef>
+        </p:style>
+        <p:txBody>
+          <a:bodyPr rtlCol="0" anchor="ctr"/>
+          <a:lstStyle/>
+          <a:p>
+            <a:pPr algn="ctr"/>
+          </a:p>
+        </p:txBody>
+      </p:sp>
+      <p:pic>
+        <p:nvPicPr>
+          <p:cNvPr id="9" name="Picture 8" descr="drawio.png"/>
+          <p:cNvPicPr>
+            <a:picLocks noChangeAspect="1"/>
+          </p:cNvPicPr>
+          <p:nvPr/>
+        </p:nvPicPr>
+        <p:blipFill>
+          <a:blip r:embed="rId2"/>
+          <a:stretch>
+            <a:fillRect/>
+          </a:stretch>
+        </p:blipFill>
+        <p:spPr>
+          <a:xfrm>
+            <a:off x="1743913" y="1792224"/>
+            <a:ext cx="1051560" cy="1051560"/>
+          </a:xfrm>
+          <a:prstGeom prst="rect">
+            <a:avLst/>
+          </a:prstGeom>
+        </p:spPr>
+      </p:pic>
+      <p:sp>
+        <p:nvSpPr>
+          <p:cNvPr id="10" name="TextBox 9"/>
+          <p:cNvSpPr txBox="1"/>
+          <p:nvPr/>
+        </p:nvSpPr>
+        <p:spPr>
+          <a:xfrm>
+            <a:off x="530352" y="2916936"/>
+            <a:ext cx="3478682" cy="502920"/>
+          </a:xfrm>
+          <a:prstGeom prst="rect">
+            <a:avLst/>
+          </a:prstGeom>
+          <a:noFill/>
+        </p:spPr>
+        <p:txBody>
+          <a:bodyPr wrap="square" anchor="t"/>
+          <a:lstStyle/>
+          <a:p>
+            <a:pPr algn="ctr"/>
+            <a:r>
+              <a:rPr sz="1300" b="1" i="0">
+                <a:solidFill>
+                  <a:srgbClr val="095292"/>
+                </a:solidFill>
+                <a:latin typeface="Calibri"/>
+              </a:rPr>
+              <a:t>Draw.Io</a:t>
+            </a:r>
+          </a:p>
+          <a:p>
+            <a:pPr algn="ctr">
+              <a:spcBef>
+                <a:spcPts val="200"/>
+              </a:spcBef>
             </a:pPr>
             <a:r>
-              <a:rPr sz="1500" b="0" i="0">
-                <a:solidFill>
-                  <a:srgbClr val="333333"/>
-                </a:solidFill>
-                <a:latin typeface="Calibri"/>
-              </a:rPr>
-              <a:t>–   </a:t>
-            </a:r>
-            <a:r>
-              <a:rPr sz="1500" b="1" i="0">
-                <a:solidFill>
-                  <a:srgbClr val="333333"/>
-                </a:solidFill>
-                <a:latin typeface="Calibri"/>
-              </a:rPr>
-              <a:t>Dueño de la clinica:</a:t>
-            </a:r>
-            <a:r>
-              <a:rPr sz="1500" b="0" i="0">
-                <a:solidFill>
-                  <a:srgbClr val="333333"/>
-                </a:solidFill>
-                <a:latin typeface="Calibri"/>
-              </a:rPr>
-              <a:t> quiere metricas del negocio.</a:t>
-            </a:r>
-          </a:p>
-          <a:p>
-            <a:pPr>
-              <a:spcAft>
-                <a:spcPts val="800"/>
-              </a:spcAft>
+              <a:rPr sz="1000" b="0" i="0">
+                <a:solidFill>
+                  <a:srgbClr val="666666"/>
+                </a:solidFill>
+                <a:latin typeface="Calibri"/>
+              </a:rPr>
+              <a:t>Diagramas UML y de contexto</a:t>
+            </a:r>
+          </a:p>
+        </p:txBody>
+      </p:sp>
+      <p:sp>
+        <p:nvSpPr>
+          <p:cNvPr id="11" name="Rounded Rectangle 10"/>
+          <p:cNvSpPr/>
+          <p:nvPr/>
+        </p:nvSpPr>
+        <p:spPr>
+          <a:xfrm>
+            <a:off x="4283354" y="1591056"/>
+            <a:ext cx="3624986" cy="2331720"/>
+          </a:xfrm>
+          <a:prstGeom prst="roundRect">
+            <a:avLst>
+              <a:gd name="adj" fmla="val 12000"/>
+            </a:avLst>
+          </a:prstGeom>
+          <a:solidFill>
+            <a:srgbClr val="F2F2F2"/>
+          </a:solidFill>
+          <a:ln>
+            <a:noFill/>
+          </a:ln>
+        </p:spPr>
+        <p:style>
+          <a:lnRef idx="1">
+            <a:schemeClr val="accent1"/>
+          </a:lnRef>
+          <a:fillRef idx="3">
+            <a:schemeClr val="accent1"/>
+          </a:fillRef>
+          <a:effectRef idx="2">
+            <a:schemeClr val="accent1"/>
+          </a:effectRef>
+          <a:fontRef idx="minor">
+            <a:schemeClr val="lt1"/>
+          </a:fontRef>
+        </p:style>
+        <p:txBody>
+          <a:bodyPr rtlCol="0" anchor="ctr"/>
+          <a:lstStyle/>
+          <a:p>
+            <a:pPr algn="ctr"/>
+          </a:p>
+        </p:txBody>
+      </p:sp>
+      <p:sp>
+        <p:nvSpPr>
+          <p:cNvPr id="12" name="Rectangle 11"/>
+          <p:cNvSpPr/>
+          <p:nvPr/>
+        </p:nvSpPr>
+        <p:spPr>
+          <a:xfrm>
+            <a:off x="4283354" y="1591056"/>
+            <a:ext cx="3624986" cy="64008"/>
+          </a:xfrm>
+          <a:prstGeom prst="rect">
+            <a:avLst/>
+          </a:prstGeom>
+          <a:solidFill>
+            <a:srgbClr val="095292"/>
+          </a:solidFill>
+          <a:ln>
+            <a:noFill/>
+          </a:ln>
+        </p:spPr>
+        <p:style>
+          <a:lnRef idx="1">
+            <a:schemeClr val="accent1"/>
+          </a:lnRef>
+          <a:fillRef idx="3">
+            <a:schemeClr val="accent1"/>
+          </a:fillRef>
+          <a:effectRef idx="2">
+            <a:schemeClr val="accent1"/>
+          </a:effectRef>
+          <a:fontRef idx="minor">
+            <a:schemeClr val="lt1"/>
+          </a:fontRef>
+        </p:style>
+        <p:txBody>
+          <a:bodyPr rtlCol="0" anchor="ctr"/>
+          <a:lstStyle/>
+          <a:p>
+            <a:pPr algn="ctr"/>
+          </a:p>
+        </p:txBody>
+      </p:sp>
+      <p:sp>
+        <p:nvSpPr>
+          <p:cNvPr id="13" name="Rectangle 12"/>
+          <p:cNvSpPr/>
+          <p:nvPr/>
+        </p:nvSpPr>
+        <p:spPr>
+          <a:xfrm>
+            <a:off x="4283354" y="1655064"/>
+            <a:ext cx="3624986" cy="27432"/>
+          </a:xfrm>
+          <a:prstGeom prst="rect">
+            <a:avLst/>
+          </a:prstGeom>
+          <a:solidFill>
+            <a:srgbClr val="FFD000"/>
+          </a:solidFill>
+          <a:ln>
+            <a:noFill/>
+          </a:ln>
+        </p:spPr>
+        <p:style>
+          <a:lnRef idx="1">
+            <a:schemeClr val="accent1"/>
+          </a:lnRef>
+          <a:fillRef idx="3">
+            <a:schemeClr val="accent1"/>
+          </a:fillRef>
+          <a:effectRef idx="2">
+            <a:schemeClr val="accent1"/>
+          </a:effectRef>
+          <a:fontRef idx="minor">
+            <a:schemeClr val="lt1"/>
+          </a:fontRef>
+        </p:style>
+        <p:txBody>
+          <a:bodyPr rtlCol="0" anchor="ctr"/>
+          <a:lstStyle/>
+          <a:p>
+            <a:pPr algn="ctr"/>
+          </a:p>
+        </p:txBody>
+      </p:sp>
+      <p:pic>
+        <p:nvPicPr>
+          <p:cNvPr id="14" name="Picture 13" descr="google_docs.png"/>
+          <p:cNvPicPr>
+            <a:picLocks noChangeAspect="1"/>
+          </p:cNvPicPr>
+          <p:nvPr/>
+        </p:nvPicPr>
+        <p:blipFill>
+          <a:blip r:embed="rId3"/>
+          <a:stretch>
+            <a:fillRect/>
+          </a:stretch>
+        </p:blipFill>
+        <p:spPr>
+          <a:xfrm>
+            <a:off x="5570067" y="1792224"/>
+            <a:ext cx="1051560" cy="1051560"/>
+          </a:xfrm>
+          <a:prstGeom prst="rect">
+            <a:avLst/>
+          </a:prstGeom>
+        </p:spPr>
+      </p:pic>
+      <p:sp>
+        <p:nvSpPr>
+          <p:cNvPr id="15" name="TextBox 14"/>
+          <p:cNvSpPr txBox="1"/>
+          <p:nvPr/>
+        </p:nvSpPr>
+        <p:spPr>
+          <a:xfrm>
+            <a:off x="4356506" y="2916936"/>
+            <a:ext cx="3478682" cy="502920"/>
+          </a:xfrm>
+          <a:prstGeom prst="rect">
+            <a:avLst/>
+          </a:prstGeom>
+          <a:noFill/>
+        </p:spPr>
+        <p:txBody>
+          <a:bodyPr wrap="square" anchor="t"/>
+          <a:lstStyle/>
+          <a:p>
+            <a:pPr algn="ctr"/>
+            <a:r>
+              <a:rPr sz="1300" b="1" i="0">
+                <a:solidFill>
+                  <a:srgbClr val="095292"/>
+                </a:solidFill>
+                <a:latin typeface="Calibri"/>
+              </a:rPr>
+              <a:t>google docs</a:t>
+            </a:r>
+          </a:p>
+          <a:p>
+            <a:pPr algn="ctr">
+              <a:spcBef>
+                <a:spcPts val="200"/>
+              </a:spcBef>
             </a:pPr>
             <a:r>
-              <a:rPr sz="1500" b="0" i="0">
-                <a:solidFill>
-                  <a:srgbClr val="333333"/>
-                </a:solidFill>
-                <a:latin typeface="Calibri"/>
-              </a:rPr>
-              <a:t>–   </a:t>
-            </a:r>
-            <a:r>
-              <a:rPr sz="1500" b="1" i="0">
-                <a:solidFill>
-                  <a:srgbClr val="333333"/>
-                </a:solidFill>
-                <a:latin typeface="Calibri"/>
-              </a:rPr>
-              <a:t>Recepcionista:</a:t>
-            </a:r>
-            <a:r>
-              <a:rPr sz="1500" b="0" i="0">
-                <a:solidFill>
-                  <a:srgbClr val="333333"/>
-                </a:solidFill>
-                <a:latin typeface="Calibri"/>
-              </a:rPr>
-              <a:t> quiere agendar rapido, con pocos clics.</a:t>
-            </a:r>
-          </a:p>
-          <a:p>
-            <a:pPr>
-              <a:spcAft>
-                <a:spcPts val="800"/>
-              </a:spcAft>
+              <a:rPr sz="1000" b="0" i="0">
+                <a:solidFill>
+                  <a:srgbClr val="666666"/>
+                </a:solidFill>
+                <a:latin typeface="Calibri"/>
+              </a:rPr>
+              <a:t>Documentos del paquete de diseño</a:t>
+            </a:r>
+          </a:p>
+        </p:txBody>
+      </p:sp>
+      <p:sp>
+        <p:nvSpPr>
+          <p:cNvPr id="16" name="Rounded Rectangle 15"/>
+          <p:cNvSpPr/>
+          <p:nvPr/>
+        </p:nvSpPr>
+        <p:spPr>
+          <a:xfrm>
+            <a:off x="8109508" y="1591056"/>
+            <a:ext cx="3624986" cy="2331720"/>
+          </a:xfrm>
+          <a:prstGeom prst="roundRect">
+            <a:avLst>
+              <a:gd name="adj" fmla="val 12000"/>
+            </a:avLst>
+          </a:prstGeom>
+          <a:solidFill>
+            <a:srgbClr val="F2F2F2"/>
+          </a:solidFill>
+          <a:ln>
+            <a:noFill/>
+          </a:ln>
+        </p:spPr>
+        <p:style>
+          <a:lnRef idx="1">
+            <a:schemeClr val="accent1"/>
+          </a:lnRef>
+          <a:fillRef idx="3">
+            <a:schemeClr val="accent1"/>
+          </a:fillRef>
+          <a:effectRef idx="2">
+            <a:schemeClr val="accent1"/>
+          </a:effectRef>
+          <a:fontRef idx="minor">
+            <a:schemeClr val="lt1"/>
+          </a:fontRef>
+        </p:style>
+        <p:txBody>
+          <a:bodyPr rtlCol="0" anchor="ctr"/>
+          <a:lstStyle/>
+          <a:p>
+            <a:pPr algn="ctr"/>
+          </a:p>
+        </p:txBody>
+      </p:sp>
+      <p:sp>
+        <p:nvSpPr>
+          <p:cNvPr id="17" name="Rectangle 16"/>
+          <p:cNvSpPr/>
+          <p:nvPr/>
+        </p:nvSpPr>
+        <p:spPr>
+          <a:xfrm>
+            <a:off x="8109508" y="1591056"/>
+            <a:ext cx="3624986" cy="64008"/>
+          </a:xfrm>
+          <a:prstGeom prst="rect">
+            <a:avLst/>
+          </a:prstGeom>
+          <a:solidFill>
+            <a:srgbClr val="095292"/>
+          </a:solidFill>
+          <a:ln>
+            <a:noFill/>
+          </a:ln>
+        </p:spPr>
+        <p:style>
+          <a:lnRef idx="1">
+            <a:schemeClr val="accent1"/>
+          </a:lnRef>
+          <a:fillRef idx="3">
+            <a:schemeClr val="accent1"/>
+          </a:fillRef>
+          <a:effectRef idx="2">
+            <a:schemeClr val="accent1"/>
+          </a:effectRef>
+          <a:fontRef idx="minor">
+            <a:schemeClr val="lt1"/>
+          </a:fontRef>
+        </p:style>
+        <p:txBody>
+          <a:bodyPr rtlCol="0" anchor="ctr"/>
+          <a:lstStyle/>
+          <a:p>
+            <a:pPr algn="ctr"/>
+          </a:p>
+        </p:txBody>
+      </p:sp>
+      <p:sp>
+        <p:nvSpPr>
+          <p:cNvPr id="18" name="Rectangle 17"/>
+          <p:cNvSpPr/>
+          <p:nvPr/>
+        </p:nvSpPr>
+        <p:spPr>
+          <a:xfrm>
+            <a:off x="8109508" y="1655064"/>
+            <a:ext cx="3624986" cy="27432"/>
+          </a:xfrm>
+          <a:prstGeom prst="rect">
+            <a:avLst/>
+          </a:prstGeom>
+          <a:solidFill>
+            <a:srgbClr val="FFD000"/>
+          </a:solidFill>
+          <a:ln>
+            <a:noFill/>
+          </a:ln>
+        </p:spPr>
+        <p:style>
+          <a:lnRef idx="1">
+            <a:schemeClr val="accent1"/>
+          </a:lnRef>
+          <a:fillRef idx="3">
+            <a:schemeClr val="accent1"/>
+          </a:fillRef>
+          <a:effectRef idx="2">
+            <a:schemeClr val="accent1"/>
+          </a:effectRef>
+          <a:fontRef idx="minor">
+            <a:schemeClr val="lt1"/>
+          </a:fontRef>
+        </p:style>
+        <p:txBody>
+          <a:bodyPr rtlCol="0" anchor="ctr"/>
+          <a:lstStyle/>
+          <a:p>
+            <a:pPr algn="ctr"/>
+          </a:p>
+        </p:txBody>
+      </p:sp>
+      <p:pic>
+        <p:nvPicPr>
+          <p:cNvPr id="19" name="Picture 18" descr="examlab.png"/>
+          <p:cNvPicPr>
+            <a:picLocks noChangeAspect="1"/>
+          </p:cNvPicPr>
+          <p:nvPr/>
+        </p:nvPicPr>
+        <p:blipFill>
+          <a:blip r:embed="rId4"/>
+          <a:stretch>
+            <a:fillRect/>
+          </a:stretch>
+        </p:blipFill>
+        <p:spPr>
+          <a:xfrm>
+            <a:off x="9396222" y="1792224"/>
+            <a:ext cx="1051560" cy="1051560"/>
+          </a:xfrm>
+          <a:prstGeom prst="rect">
+            <a:avLst/>
+          </a:prstGeom>
+        </p:spPr>
+      </p:pic>
+      <p:sp>
+        <p:nvSpPr>
+          <p:cNvPr id="20" name="TextBox 19"/>
+          <p:cNvSpPr txBox="1"/>
+          <p:nvPr/>
+        </p:nvSpPr>
+        <p:spPr>
+          <a:xfrm>
+            <a:off x="8182660" y="2916936"/>
+            <a:ext cx="3478682" cy="502920"/>
+          </a:xfrm>
+          <a:prstGeom prst="rect">
+            <a:avLst/>
+          </a:prstGeom>
+          <a:noFill/>
+        </p:spPr>
+        <p:txBody>
+          <a:bodyPr wrap="square" anchor="t"/>
+          <a:lstStyle/>
+          <a:p>
+            <a:pPr algn="ctr"/>
+            <a:r>
+              <a:rPr sz="1300" b="1" i="0">
+                <a:solidFill>
+                  <a:srgbClr val="095292"/>
+                </a:solidFill>
+                <a:latin typeface="Calibri"/>
+              </a:rPr>
+              <a:t>ExamLab</a:t>
+            </a:r>
+          </a:p>
+          <a:p>
+            <a:pPr algn="ctr">
+              <a:spcBef>
+                <a:spcPts val="200"/>
+              </a:spcBef>
             </a:pPr>
             <a:r>
-              <a:rPr sz="1500" b="0" i="0">
-                <a:solidFill>
-                  <a:srgbClr val="333333"/>
-                </a:solidFill>
-                <a:latin typeface="Calibri"/>
-              </a:rPr>
-              <a:t>–   </a:t>
-            </a:r>
-            <a:r>
-              <a:rPr sz="1500" b="1" i="0">
-                <a:solidFill>
-                  <a:srgbClr val="333333"/>
-                </a:solidFill>
-                <a:latin typeface="Calibri"/>
-              </a:rPr>
-              <a:t>Veterinario:</a:t>
-            </a:r>
-            <a:r>
-              <a:rPr sz="1500" b="0" i="0">
-                <a:solidFill>
-                  <a:srgbClr val="333333"/>
-                </a:solidFill>
-                <a:latin typeface="Calibri"/>
-              </a:rPr>
-              <a:t> quiere el historial del paciente a la mano.</a:t>
-            </a:r>
-          </a:p>
-          <a:p>
-            <a:pPr>
-              <a:spcAft>
-                <a:spcPts val="800"/>
-              </a:spcAft>
-            </a:pPr>
-            <a:r>
-              <a:rPr sz="1500" b="0" i="0">
-                <a:solidFill>
-                  <a:srgbClr val="333333"/>
-                </a:solidFill>
-                <a:latin typeface="Calibri"/>
-              </a:rPr>
-              <a:t>–   Sus intereses </a:t>
-            </a:r>
-            <a:r>
-              <a:rPr sz="1500" b="1" i="0">
-                <a:solidFill>
-                  <a:srgbClr val="333333"/>
-                </a:solidFill>
-                <a:latin typeface="Calibri"/>
-              </a:rPr>
-              <a:t>entran en conflicto</a:t>
-            </a:r>
-            <a:r>
-              <a:rPr sz="1500" b="0" i="0">
-                <a:solidFill>
-                  <a:srgbClr val="333333"/>
-                </a:solidFill>
-                <a:latin typeface="Calibri"/>
-              </a:rPr>
-              <a:t> (mas datos = mas lento de registrar). Resolver ese conflicto es trabajo de analisis, no de programacion.</a:t>
-            </a:r>
-          </a:p>
-        </p:txBody>
-      </p:sp>
-      <p:sp>
-        <p:nvSpPr>
-          <p:cNvPr id="6" name="TextBox 5"/>
+              <a:rPr sz="1000" b="0" i="0">
+                <a:solidFill>
+                  <a:srgbClr val="666666"/>
+                </a:solidFill>
+                <a:latin typeface="Calibri"/>
+              </a:rPr>
+              <a:t>Entrega del taller · domingo 23:59</a:t>
+            </a:r>
+          </a:p>
+        </p:txBody>
+      </p:sp>
+      <p:sp>
+        <p:nvSpPr>
+          <p:cNvPr id="21" name="TextBox 20"/>
           <p:cNvSpPr txBox="1"/>
           <p:nvPr/>
         </p:nvSpPr>
@@ -7583,7 +9667,7 @@
                 </a:solidFill>
                 <a:latin typeface="Calibri"/>
               </a:rPr>
-              <a:t>Ciclo de vida: siempre las mismas fases</a:t>
+              <a:t>Taller PI — por que importa</a:t>
             </a:r>
           </a:p>
         </p:txBody>
@@ -7622,7 +9706,25 @@
                 </a:solidFill>
                 <a:latin typeface="Calibri"/>
               </a:rPr>
-              <a:t>–   Requisitos → Diseño → Construccion → Pruebas → Mantenimiento.</a:t>
+              <a:t>–   </a:t>
+            </a:r>
+            <a:r>
+              <a:rPr sz="1600" b="1" i="0">
+                <a:solidFill>
+                  <a:srgbClr val="333333"/>
+                </a:solidFill>
+                <a:latin typeface="Calibri"/>
+              </a:rPr>
+              <a:t>Por que importa al PI:</a:t>
+            </a:r>
+            <a:r>
+              <a:rPr sz="1600" b="0" i="0">
+                <a:solidFill>
+                  <a:srgbClr val="333333"/>
+                </a:solidFill>
+                <a:latin typeface="Calibri"/>
+              </a:rPr>
+              <a:t> la ficha de hoy es la base de todo el paquete de diseño; si el dominio queda vago, los requisitos y los diagramas tambien.</a:t>
             </a:r>
           </a:p>
           <a:p>
@@ -7638,25 +9740,7 @@
                 </a:solidFill>
                 <a:latin typeface="Calibri"/>
               </a:rPr>
-              <a:t>–   Lo que cambia entre metodologias no son las fases: es </a:t>
-            </a:r>
-            <a:r>
-              <a:rPr sz="1600" b="1" i="0">
-                <a:solidFill>
-                  <a:srgbClr val="333333"/>
-                </a:solidFill>
-                <a:latin typeface="Calibri"/>
-              </a:rPr>
-              <a:t>como se recorren</a:t>
-            </a:r>
-            <a:r>
-              <a:rPr sz="1600" b="0" i="0">
-                <a:solidFill>
-                  <a:srgbClr val="333333"/>
-                </a:solidFill>
-                <a:latin typeface="Calibri"/>
-              </a:rPr>
-              <a:t>.</a:t>
+              <a:t>–   En esta asignatura el entregable son los planos, no el codigo: conviene decirlo desde el primer dia.</a:t>
             </a:r>
           </a:p>
           <a:p>
@@ -7672,41 +9756,7 @@
                 </a:solidFill>
                 <a:latin typeface="Calibri"/>
               </a:rPr>
-              <a:t>–   Una sola vez y en orden (cascada) o en </a:t>
-            </a:r>
-            <a:r>
-              <a:rPr sz="1600" b="1" i="0">
-                <a:solidFill>
-                  <a:srgbClr val="333333"/>
-                </a:solidFill>
-                <a:latin typeface="Calibri"/>
-              </a:rPr>
-              <a:t>ciclos cortos</a:t>
-            </a:r>
-            <a:r>
-              <a:rPr sz="1600" b="0" i="0">
-                <a:solidFill>
-                  <a:srgbClr val="333333"/>
-                </a:solidFill>
-                <a:latin typeface="Calibri"/>
-              </a:rPr>
-              <a:t> que repiten todo (iterativo/agil).</a:t>
-            </a:r>
-          </a:p>
-          <a:p>
-            <a:pPr>
-              <a:spcAft>
-                <a:spcPts val="800"/>
-              </a:spcAft>
-            </a:pPr>
-            <a:r>
-              <a:rPr sz="1600" b="0" i="0">
-                <a:solidFill>
-                  <a:srgbClr val="333333"/>
-                </a:solidFill>
-                <a:latin typeface="Calibri"/>
-              </a:rPr>
-              <a:t>–   Las comparamos a fondo en las Clases 2, 3 y 4.</a:t>
+              <a:t>–   El diagnostico de hoy no tiene nota: sirve para calibrar el ritmo de las proximas clases.</a:t>
             </a:r>
           </a:p>
         </p:txBody>
@@ -7887,7 +9937,7 @@
                 </a:solidFill>
                 <a:latin typeface="Calibri"/>
               </a:rPr>
-              <a:t>Taller de hoy — conformar equipo y acotar el dominio</a:t>
+              <a:t>Taller PI — punto de partida</a:t>
             </a:r>
           </a:p>
         </p:txBody>
@@ -7920,22 +9970,13 @@
               </a:spcAft>
             </a:pPr>
             <a:r>
-              <a:rPr sz="1600" b="1" i="0">
+              <a:rPr sz="1600" b="0" i="0">
                 <a:solidFill>
                   <a:srgbClr val="333333"/>
                 </a:solidFill>
                 <a:latin typeface="Calibri"/>
               </a:rPr>
-              <a:t>1.</a:t>
-            </a:r>
-            <a:r>
-              <a:rPr sz="1600" b="0" i="0">
-                <a:solidFill>
-                  <a:srgbClr val="333333"/>
-                </a:solidFill>
-                <a:latin typeface="Calibri"/>
-              </a:rPr>
-              <a:t> Formen equipo de 2-3 personas.</a:t>
+              <a:t>–   Dominio por defecto: la clinica veterinaria Huellitas del Proyecto Integrador.</a:t>
             </a:r>
           </a:p>
           <a:p>
@@ -7951,43 +9992,7 @@
                 </a:solidFill>
                 <a:latin typeface="Calibri"/>
               </a:rPr>
-              <a:t>–   </a:t>
-            </a:r>
-            <a:r>
-              <a:rPr sz="1600" b="1" i="0">
-                <a:solidFill>
-                  <a:srgbClr val="333333"/>
-                </a:solidFill>
-                <a:latin typeface="Calibri"/>
-              </a:rPr>
-              <a:t>2.</a:t>
-            </a:r>
-            <a:r>
-              <a:rPr sz="1600" b="0" i="0">
-                <a:solidFill>
-                  <a:srgbClr val="333333"/>
-                </a:solidFill>
-                <a:latin typeface="Calibri"/>
-              </a:rPr>
-              <a:t> Escriban el </a:t>
-            </a:r>
-            <a:r>
-              <a:rPr sz="1600" b="1" i="0">
-                <a:solidFill>
-                  <a:srgbClr val="333333"/>
-                </a:solidFill>
-                <a:latin typeface="Calibri"/>
-              </a:rPr>
-              <a:t>problema</a:t>
-            </a:r>
-            <a:r>
-              <a:rPr sz="1600" b="0" i="0">
-                <a:solidFill>
-                  <a:srgbClr val="333333"/>
-                </a:solidFill>
-                <a:latin typeface="Calibri"/>
-              </a:rPr>
-              <a:t> en 2-3 frases (quien sufre que).</a:t>
+              <a:t>–   Herramientas: Google Docs para la ficha y draw.io o Excalidraw para el boceto.</a:t>
             </a:r>
           </a:p>
           <a:p>
@@ -8003,147 +10008,7 @@
                 </a:solidFill>
                 <a:latin typeface="Calibri"/>
               </a:rPr>
-              <a:t>–   </a:t>
-            </a:r>
-            <a:r>
-              <a:rPr sz="1600" b="1" i="0">
-                <a:solidFill>
-                  <a:srgbClr val="333333"/>
-                </a:solidFill>
-                <a:latin typeface="Calibri"/>
-              </a:rPr>
-              <a:t>3.</a:t>
-            </a:r>
-            <a:r>
-              <a:rPr sz="1600" b="0" i="0">
-                <a:solidFill>
-                  <a:srgbClr val="333333"/>
-                </a:solidFill>
-                <a:latin typeface="Calibri"/>
-              </a:rPr>
-              <a:t> Listen </a:t>
-            </a:r>
-            <a:r>
-              <a:rPr sz="1600" b="1" i="0">
-                <a:solidFill>
-                  <a:srgbClr val="333333"/>
-                </a:solidFill>
-                <a:latin typeface="Calibri"/>
-              </a:rPr>
-              <a:t>3-5 capacidades</a:t>
-            </a:r>
-            <a:r>
-              <a:rPr sz="1600" b="0" i="0">
-                <a:solidFill>
-                  <a:srgbClr val="333333"/>
-                </a:solidFill>
-                <a:latin typeface="Calibri"/>
-              </a:rPr>
-              <a:t> del sistema.</a:t>
-            </a:r>
-          </a:p>
-          <a:p>
-            <a:pPr>
-              <a:spcAft>
-                <a:spcPts val="800"/>
-              </a:spcAft>
-            </a:pPr>
-            <a:r>
-              <a:rPr sz="1600" b="0" i="0">
-                <a:solidFill>
-                  <a:srgbClr val="333333"/>
-                </a:solidFill>
-                <a:latin typeface="Calibri"/>
-              </a:rPr>
-              <a:t>–   </a:t>
-            </a:r>
-            <a:r>
-              <a:rPr sz="1600" b="1" i="0">
-                <a:solidFill>
-                  <a:srgbClr val="333333"/>
-                </a:solidFill>
-                <a:latin typeface="Calibri"/>
-              </a:rPr>
-              <a:t>4.</a:t>
-            </a:r>
-            <a:r>
-              <a:rPr sz="1600" b="0" i="0">
-                <a:solidFill>
-                  <a:srgbClr val="333333"/>
-                </a:solidFill>
-                <a:latin typeface="Calibri"/>
-              </a:rPr>
-              <a:t> Identifiquen </a:t>
-            </a:r>
-            <a:r>
-              <a:rPr sz="1600" b="1" i="0">
-                <a:solidFill>
-                  <a:srgbClr val="333333"/>
-                </a:solidFill>
-                <a:latin typeface="Calibri"/>
-              </a:rPr>
-              <a:t>2-3 actores</a:t>
-            </a:r>
-            <a:r>
-              <a:rPr sz="1600" b="0" i="0">
-                <a:solidFill>
-                  <a:srgbClr val="333333"/>
-                </a:solidFill>
-                <a:latin typeface="Calibri"/>
-              </a:rPr>
-              <a:t>.</a:t>
-            </a:r>
-          </a:p>
-          <a:p>
-            <a:pPr>
-              <a:spcAft>
-                <a:spcPts val="800"/>
-              </a:spcAft>
-            </a:pPr>
-            <a:r>
-              <a:rPr sz="1600" b="0" i="0">
-                <a:solidFill>
-                  <a:srgbClr val="333333"/>
-                </a:solidFill>
-                <a:latin typeface="Calibri"/>
-              </a:rPr>
-              <a:t>–   </a:t>
-            </a:r>
-            <a:r>
-              <a:rPr sz="1600" b="1" i="0">
-                <a:solidFill>
-                  <a:srgbClr val="333333"/>
-                </a:solidFill>
-                <a:latin typeface="Calibri"/>
-              </a:rPr>
-              <a:t>5.</a:t>
-            </a:r>
-            <a:r>
-              <a:rPr sz="1600" b="0" i="0">
-                <a:solidFill>
-                  <a:srgbClr val="333333"/>
-                </a:solidFill>
-                <a:latin typeface="Calibri"/>
-              </a:rPr>
-              <a:t> Escriban que </a:t>
-            </a:r>
-            <a:r>
-              <a:rPr sz="1600" b="1" i="0">
-                <a:solidFill>
-                  <a:srgbClr val="333333"/>
-                </a:solidFill>
-                <a:latin typeface="Calibri"/>
-              </a:rPr>
-              <a:t>NO</a:t>
-            </a:r>
-            <a:r>
-              <a:rPr sz="1600" b="0" i="0">
-                <a:solidFill>
-                  <a:srgbClr val="333333"/>
-                </a:solidFill>
-                <a:latin typeface="Calibri"/>
-              </a:rPr>
-              <a:t> hara el sistema (fuera de alcance).</a:t>
+              <a:t>–   Se parte de cero: no hay documentacion previa del sistema.</a:t>
             </a:r>
           </a:p>
         </p:txBody>

--- a/Seminario de Sistemas/Clases/Clase 1 - Conceptos iniciales/Presentacion.pptx
+++ b/Seminario de Sistemas/Clases/Clase 1 - Conceptos iniciales/Presentacion.pptx
@@ -5469,7 +5469,7 @@
                 </a:solidFill>
                 <a:latin typeface="Calibri"/>
               </a:rPr>
-              <a:t>Entrega en ExamLab (examlab.lovable.app/app)</a:t>
+              <a:t>Entrega en ExamLab (https://examlab.lovable.app/)</a:t>
             </a:r>
             <a:r>
               <a:rPr sz="1600" b="0" i="0">
@@ -6073,7 +6073,7 @@
                 </a:solidFill>
                 <a:latin typeface="Calibri"/>
               </a:rPr>
-              <a:t>Entrega del taller en ExamLab (examlab.lovable.app/app) · domingo 23:59.</a:t>
+              <a:t>Entrega del taller en ExamLab (https://examlab.lovable.app/) · domingo 23:59.</a:t>
             </a:r>
           </a:p>
         </p:txBody>

--- a/Seminario de Sistemas/Clases/Clase 1 - Conceptos iniciales/Presentacion.pptx
+++ b/Seminario de Sistemas/Clases/Clase 1 - Conceptos iniciales/Presentacion.pptx
@@ -7773,54 +7773,6 @@
                 <a:latin typeface="Calibri"/>
               </a:rPr>
               <a:t>–   Todo desarrollo pasa por las mismas fases —requisitos, diseño, construccion, pruebas, mantenimiento— y lo que…</a:t>
-            </a:r>
-          </a:p>
-          <a:p>
-            <a:pPr>
-              <a:spcAft>
-                <a:spcPts val="800"/>
-              </a:spcAft>
-            </a:pPr>
-            <a:r>
-              <a:rPr sz="1500" b="0" i="0">
-                <a:solidFill>
-                  <a:srgbClr val="333333"/>
-                </a:solidFill>
-                <a:latin typeface="Calibri"/>
-              </a:rPr>
-              <a:t>–   Queda una pregunta que el estudiante hace el primer dia y conviene responder sin rodeos: para que sirve documentar…</a:t>
-            </a:r>
-          </a:p>
-          <a:p>
-            <a:pPr>
-              <a:spcAft>
-                <a:spcPts val="800"/>
-              </a:spcAft>
-            </a:pPr>
-            <a:r>
-              <a:rPr sz="1500" b="0" i="0">
-                <a:solidFill>
-                  <a:srgbClr val="333333"/>
-                </a:solidFill>
-                <a:latin typeface="Calibri"/>
-              </a:rPr>
-              <a:t>–   Conviene tambien aclarar el mapa del semestre en una sola frase, porque de eso depende que el estudiante sepa…</a:t>
-            </a:r>
-          </a:p>
-          <a:p>
-            <a:pPr>
-              <a:spcAft>
-                <a:spcPts val="800"/>
-              </a:spcAft>
-            </a:pPr>
-            <a:r>
-              <a:rPr sz="1500" b="0" i="0">
-                <a:solidFill>
-                  <a:srgbClr val="333333"/>
-                </a:solidFill>
-                <a:latin typeface="Calibri"/>
-              </a:rPr>
-              <a:t>–   Error tipico del docente que no domina el tema: empezar por las metodologias (cascada, Scrum) antes de que el…</a:t>
             </a:r>
           </a:p>
         </p:txBody>

--- a/Seminario de Sistemas/Clases/Clase 1 - Conceptos iniciales/Presentacion.pptx
+++ b/Seminario de Sistemas/Clases/Clase 1 - Conceptos iniciales/Presentacion.pptx
@@ -3774,7 +3774,7 @@
                 </a:solidFill>
                 <a:latin typeface="Calibri"/>
               </a:rPr>
-              <a:t>Formen equipo de 2-3 personas y definan quien sera el vocero tecnico del grupo ante el docente.</a:t>
+              <a:t>Modalidad de trabajo: individual por defecto. Abra su ficha de dominio y escriba su nombre. Si el docente autoriza equipos de 2 o 3 integrantes, la ficha puede ser compartida, pero la entrega en ExamLab siempre es individual y con sus propias palabras.</a:t>
             </a:r>
           </a:p>
         </p:txBody>
@@ -4905,7 +4905,7 @@
                 </a:solidFill>
                 <a:latin typeface="Calibri"/>
               </a:rPr>
-              <a:t>¿Un compañero de otro equipo entenderia nuestro sistema en 30 segundos, sin que se lo expliquemos?</a:t>
+              <a:t>¿Otro compañero entenderia mi sistema en 30 segundos, sin que se lo explique?</a:t>
             </a:r>
           </a:p>
         </p:txBody>
@@ -5308,7 +5308,7 @@
                 </a:solidFill>
                 <a:latin typeface="Calibri"/>
               </a:rPr>
-              <a:t> Ficha del equipo: problema en 2-3 frases, 3-5 capacidades, 2-3 actores y lo que queda fuera de alcance</a:t>
+              <a:t> Ficha de dominio: problema en 2-3 frases, 3-5 capacidades, 2-3 actores y lo que queda fuera de alcance</a:t>
             </a:r>
           </a:p>
           <a:p>
@@ -5797,7 +5797,7 @@
                 </a:solidFill>
                 <a:latin typeface="Calibri"/>
               </a:rPr>
-              <a:t>Hito: Equipo conformado y dominio del proyecto acotado</a:t>
+              <a:t>Hito: Dominio del proyecto acotado (trabajo individual por defecto)</a:t>
             </a:r>
           </a:p>
         </p:txBody>
@@ -6273,7 +6273,7 @@
                 </a:solidFill>
                 <a:latin typeface="Calibri"/>
               </a:rPr>
-              <a:t>Equipo conformado y dominio del proyecto acotado</a:t>
+              <a:t>Dominio del proyecto acotado (trabajo individual por defecto)</a:t>
             </a:r>
           </a:p>
           <a:p>
@@ -6289,7 +6289,7 @@
                 </a:solidFill>
                 <a:latin typeface="Calibri"/>
               </a:rPr>
-              <a:t>Entregable: Ficha del equipo: problema en 2-3 frases, 3-5 capacidades, 2-3 actores y lo que queda fuera de alcance</a:t>
+              <a:t>Entregable: Ficha de dominio: problema en 2-3 frases, 3-5 capacidades, 2-3 actores y lo que queda fuera de alcance</a:t>
             </a:r>
           </a:p>
           <a:p>
@@ -6543,7 +6543,7 @@
                 </a:solidFill>
                 <a:latin typeface="Calibri"/>
               </a:rPr>
-              <a:t> Equipo conformado y dominio del proyecto acotado</a:t>
+              <a:t> Dominio del proyecto acotado (trabajo individual por defecto)</a:t>
             </a:r>
           </a:p>
           <a:p>
@@ -6620,7 +6620,7 @@
                 </a:solidFill>
                 <a:latin typeface="Calibri"/>
               </a:rPr>
-              <a:t> Ficha del equipo: problema en 2-3 frases, 3-5 capacidades, 2-3 actores y lo que queda fuera de alcance</a:t>
+              <a:t> Ficha de dominio: problema en 2-3 frases, 3-5 capacidades, 2-3 actores y lo que queda fuera de alcance</a:t>
             </a:r>
           </a:p>
           <a:p>

--- a/Seminario de Sistemas/Clases/Clase 1 - Conceptos iniciales/Presentacion.pptx
+++ b/Seminario de Sistemas/Clases/Clase 1 - Conceptos iniciales/Presentacion.pptx
@@ -5469,7 +5469,7 @@
                 </a:solidFill>
                 <a:latin typeface="Calibri"/>
               </a:rPr>
-              <a:t>Entrega en ExamLab (https://examlab.lovable.app/)</a:t>
+              <a:t>Entrega en ExamLab (https://uniaj.examlab.workers.dev/)</a:t>
             </a:r>
             <a:r>
               <a:rPr sz="1600" b="0" i="0">
@@ -6073,7 +6073,7 @@
                 </a:solidFill>
                 <a:latin typeface="Calibri"/>
               </a:rPr>
-              <a:t>Entrega del taller en ExamLab (https://examlab.lovable.app/) · domingo 23:59.</a:t>
+              <a:t>Entrega del taller en ExamLab (https://uniaj.examlab.workers.dev/) · domingo 23:59.</a:t>
             </a:r>
           </a:p>
         </p:txBody>

--- a/Seminario de Sistemas/Clases/Clase 1 - Conceptos iniciales/Presentacion.pptx
+++ b/Seminario de Sistemas/Clases/Clase 1 - Conceptos iniciales/Presentacion.pptx
@@ -3633,7 +3633,7 @@
         <p:spPr>
           <a:xfrm>
             <a:off x="457200" y="1234440"/>
-            <a:ext cx="11277295" cy="777240"/>
+            <a:ext cx="11277295" cy="950976"/>
           </a:xfrm>
           <a:prstGeom prst="roundRect">
             <a:avLst>
@@ -3677,7 +3677,7 @@
         </p:nvSpPr>
         <p:spPr>
           <a:xfrm>
-            <a:off x="594360" y="1403604"/>
+            <a:off x="594360" y="1490472"/>
             <a:ext cx="438912" cy="438912"/>
           </a:xfrm>
           <a:prstGeom prst="roundRect">
@@ -3722,7 +3722,7 @@
         </p:nvSpPr>
         <p:spPr>
           <a:xfrm>
-            <a:off x="594360" y="1403604"/>
+            <a:off x="594360" y="1490472"/>
             <a:ext cx="438912" cy="438912"/>
           </a:xfrm>
           <a:prstGeom prst="rect">
@@ -3756,7 +3756,7 @@
         <p:spPr>
           <a:xfrm>
             <a:off x="1188720" y="1325880"/>
-            <a:ext cx="10271455" cy="612647"/>
+            <a:ext cx="10271455" cy="786384"/>
           </a:xfrm>
           <a:prstGeom prst="rect">
             <a:avLst/>
@@ -3787,8 +3787,8 @@
         </p:nvSpPr>
         <p:spPr>
           <a:xfrm>
-            <a:off x="457200" y="2103120"/>
-            <a:ext cx="11277295" cy="777240"/>
+            <a:off x="457200" y="2276856"/>
+            <a:ext cx="11277295" cy="950976"/>
           </a:xfrm>
           <a:prstGeom prst="roundRect">
             <a:avLst>
@@ -3832,7 +3832,7 @@
         </p:nvSpPr>
         <p:spPr>
           <a:xfrm>
-            <a:off x="594360" y="2272284"/>
+            <a:off x="594360" y="2532888"/>
             <a:ext cx="438912" cy="438912"/>
           </a:xfrm>
           <a:prstGeom prst="roundRect">
@@ -3877,7 +3877,7 @@
         </p:nvSpPr>
         <p:spPr>
           <a:xfrm>
-            <a:off x="594360" y="2272284"/>
+            <a:off x="594360" y="2532888"/>
             <a:ext cx="438912" cy="438912"/>
           </a:xfrm>
           <a:prstGeom prst="rect">
@@ -3910,8 +3910,8 @@
         </p:nvSpPr>
         <p:spPr>
           <a:xfrm>
-            <a:off x="1188720" y="2194560"/>
-            <a:ext cx="10271455" cy="612647"/>
+            <a:off x="1188720" y="2368296"/>
+            <a:ext cx="10271455" cy="786384"/>
           </a:xfrm>
           <a:prstGeom prst="rect">
             <a:avLst/>
@@ -3942,8 +3942,8 @@
         </p:nvSpPr>
         <p:spPr>
           <a:xfrm>
-            <a:off x="457200" y="2971800"/>
-            <a:ext cx="11277295" cy="777240"/>
+            <a:off x="457200" y="3319272"/>
+            <a:ext cx="11277295" cy="950976"/>
           </a:xfrm>
           <a:prstGeom prst="roundRect">
             <a:avLst>
@@ -3987,7 +3987,7 @@
         </p:nvSpPr>
         <p:spPr>
           <a:xfrm>
-            <a:off x="594360" y="3140964"/>
+            <a:off x="594360" y="3575304"/>
             <a:ext cx="438912" cy="438912"/>
           </a:xfrm>
           <a:prstGeom prst="roundRect">
@@ -4032,7 +4032,7 @@
         </p:nvSpPr>
         <p:spPr>
           <a:xfrm>
-            <a:off x="594360" y="3140964"/>
+            <a:off x="594360" y="3575304"/>
             <a:ext cx="438912" cy="438912"/>
           </a:xfrm>
           <a:prstGeom prst="rect">
@@ -4065,8 +4065,8 @@
         </p:nvSpPr>
         <p:spPr>
           <a:xfrm>
-            <a:off x="1188720" y="3063240"/>
-            <a:ext cx="10271455" cy="612647"/>
+            <a:off x="1188720" y="3410712"/>
+            <a:ext cx="10271455" cy="786384"/>
           </a:xfrm>
           <a:prstGeom prst="rect">
             <a:avLst/>
@@ -4097,8 +4097,8 @@
         </p:nvSpPr>
         <p:spPr>
           <a:xfrm>
-            <a:off x="457200" y="3840479"/>
-            <a:ext cx="11277295" cy="777240"/>
+            <a:off x="457200" y="4361688"/>
+            <a:ext cx="11277295" cy="950976"/>
           </a:xfrm>
           <a:prstGeom prst="roundRect">
             <a:avLst>
@@ -4142,7 +4142,7 @@
         </p:nvSpPr>
         <p:spPr>
           <a:xfrm>
-            <a:off x="594360" y="4009643"/>
+            <a:off x="594360" y="4617720"/>
             <a:ext cx="438912" cy="438912"/>
           </a:xfrm>
           <a:prstGeom prst="roundRect">
@@ -4187,7 +4187,7 @@
         </p:nvSpPr>
         <p:spPr>
           <a:xfrm>
-            <a:off x="594360" y="4009643"/>
+            <a:off x="594360" y="4617720"/>
             <a:ext cx="438912" cy="438912"/>
           </a:xfrm>
           <a:prstGeom prst="rect">
@@ -4220,8 +4220,8 @@
         </p:nvSpPr>
         <p:spPr>
           <a:xfrm>
-            <a:off x="1188720" y="3931919"/>
-            <a:ext cx="10271455" cy="612647"/>
+            <a:off x="1188720" y="4453128"/>
+            <a:ext cx="10271455" cy="786384"/>
           </a:xfrm>
           <a:prstGeom prst="rect">
             <a:avLst/>
@@ -4252,8 +4252,8 @@
         </p:nvSpPr>
         <p:spPr>
           <a:xfrm>
-            <a:off x="457200" y="4709160"/>
-            <a:ext cx="11277295" cy="777240"/>
+            <a:off x="457200" y="5404104"/>
+            <a:ext cx="11277295" cy="950976"/>
           </a:xfrm>
           <a:prstGeom prst="roundRect">
             <a:avLst>
@@ -4297,7 +4297,7 @@
         </p:nvSpPr>
         <p:spPr>
           <a:xfrm>
-            <a:off x="594360" y="4878324"/>
+            <a:off x="594360" y="5660136"/>
             <a:ext cx="438912" cy="438912"/>
           </a:xfrm>
           <a:prstGeom prst="roundRect">
@@ -4342,7 +4342,7 @@
         </p:nvSpPr>
         <p:spPr>
           <a:xfrm>
-            <a:off x="594360" y="4878324"/>
+            <a:off x="594360" y="5660136"/>
             <a:ext cx="438912" cy="438912"/>
           </a:xfrm>
           <a:prstGeom prst="rect">
@@ -4375,8 +4375,8 @@
         </p:nvSpPr>
         <p:spPr>
           <a:xfrm>
-            <a:off x="1188720" y="4800600"/>
-            <a:ext cx="10271455" cy="612647"/>
+            <a:off x="1188720" y="5495544"/>
+            <a:ext cx="10271455" cy="786384"/>
           </a:xfrm>
           <a:prstGeom prst="rect">
             <a:avLst/>
@@ -8978,8 +8978,8 @@
         </p:blipFill>
         <p:spPr>
           <a:xfrm>
-            <a:off x="1743913" y="1792224"/>
-            <a:ext cx="1051560" cy="1051560"/>
+            <a:off x="1643329" y="1847087"/>
+            <a:ext cx="1252728" cy="1252728"/>
           </a:xfrm>
           <a:prstGeom prst="rect">
             <a:avLst/>
@@ -8994,8 +8994,8 @@
         </p:nvSpPr>
         <p:spPr>
           <a:xfrm>
-            <a:off x="530352" y="2916936"/>
-            <a:ext cx="3478682" cy="502920"/>
+            <a:off x="530352" y="3191256"/>
+            <a:ext cx="3478682" cy="621792"/>
           </a:xfrm>
           <a:prstGeom prst="rect">
             <a:avLst/>
@@ -9182,8 +9182,8 @@
         </p:blipFill>
         <p:spPr>
           <a:xfrm>
-            <a:off x="5570067" y="1792224"/>
-            <a:ext cx="1051560" cy="1051560"/>
+            <a:off x="5469483" y="1847087"/>
+            <a:ext cx="1252728" cy="1252728"/>
           </a:xfrm>
           <a:prstGeom prst="rect">
             <a:avLst/>
@@ -9198,8 +9198,8 @@
         </p:nvSpPr>
         <p:spPr>
           <a:xfrm>
-            <a:off x="4356506" y="2916936"/>
-            <a:ext cx="3478682" cy="502920"/>
+            <a:off x="4356506" y="3191256"/>
+            <a:ext cx="3478682" cy="621792"/>
           </a:xfrm>
           <a:prstGeom prst="rect">
             <a:avLst/>
@@ -9386,8 +9386,8 @@
         </p:blipFill>
         <p:spPr>
           <a:xfrm>
-            <a:off x="9396222" y="1792224"/>
-            <a:ext cx="1051560" cy="1051560"/>
+            <a:off x="9295638" y="1847087"/>
+            <a:ext cx="1252728" cy="1252728"/>
           </a:xfrm>
           <a:prstGeom prst="rect">
             <a:avLst/>
@@ -9402,8 +9402,8 @@
         </p:nvSpPr>
         <p:spPr>
           <a:xfrm>
-            <a:off x="8182660" y="2916936"/>
-            <a:ext cx="3478682" cy="502920"/>
+            <a:off x="8182660" y="3191256"/>
+            <a:ext cx="3478682" cy="621792"/>
           </a:xfrm>
           <a:prstGeom prst="rect">
             <a:avLst/>

--- a/Seminario de Sistemas/Clases/Clase 1 - Conceptos iniciales/Presentacion.pptx
+++ b/Seminario de Sistemas/Clases/Clase 1 - Conceptos iniciales/Presentacion.pptx
@@ -5284,7 +5284,7 @@
               </a:spcAft>
             </a:pPr>
             <a:r>
-              <a:rPr sz="1600" b="0" i="0">
+              <a:rPr sz="2000" b="0" i="0">
                 <a:solidFill>
                   <a:srgbClr val="333333"/>
                 </a:solidFill>
@@ -5293,7 +5293,7 @@
               <a:t>–   </a:t>
             </a:r>
             <a:r>
-              <a:rPr sz="1600" b="1" i="0">
+              <a:rPr sz="2000" b="1" i="0">
                 <a:solidFill>
                   <a:srgbClr val="333333"/>
                 </a:solidFill>
@@ -5302,7 +5302,7 @@
               <a:t>Entregable:</a:t>
             </a:r>
             <a:r>
-              <a:rPr sz="1600" b="0" i="0">
+              <a:rPr sz="2000" b="0" i="0">
                 <a:solidFill>
                   <a:srgbClr val="333333"/>
                 </a:solidFill>
@@ -5318,7 +5318,7 @@
               </a:spcAft>
             </a:pPr>
             <a:r>
-              <a:rPr sz="1600" b="0" i="0">
+              <a:rPr sz="2000" b="0" i="0">
                 <a:solidFill>
                   <a:srgbClr val="333333"/>
                 </a:solidFill>
@@ -5327,7 +5327,7 @@
               <a:t>–   </a:t>
             </a:r>
             <a:r>
-              <a:rPr sz="1600" b="1" i="0">
+              <a:rPr sz="2000" b="1" i="0">
                 <a:solidFill>
                   <a:srgbClr val="333333"/>
                 </a:solidFill>
@@ -5336,7 +5336,7 @@
               <a:t>Exito:</a:t>
             </a:r>
             <a:r>
-              <a:rPr sz="1600" b="0" i="0">
+              <a:rPr sz="2000" b="0" i="0">
                 <a:solidFill>
                   <a:srgbClr val="333333"/>
                 </a:solidFill>
@@ -5352,7 +5352,7 @@
               </a:spcAft>
             </a:pPr>
             <a:r>
-              <a:rPr sz="1600" b="0" i="0">
+              <a:rPr sz="2000" b="0" i="0">
                 <a:solidFill>
                   <a:srgbClr val="333333"/>
                 </a:solidFill>
@@ -5361,7 +5361,7 @@
               <a:t>–   </a:t>
             </a:r>
             <a:r>
-              <a:rPr sz="1600" b="1" i="0">
+              <a:rPr sz="2000" b="1" i="0">
                 <a:solidFill>
                   <a:srgbClr val="333333"/>
                 </a:solidFill>
@@ -5370,7 +5370,7 @@
               <a:t>Exito:</a:t>
             </a:r>
             <a:r>
-              <a:rPr sz="1600" b="0" i="0">
+              <a:rPr sz="2000" b="0" i="0">
                 <a:solidFill>
                   <a:srgbClr val="333333"/>
                 </a:solidFill>
@@ -5386,7 +5386,7 @@
               </a:spcAft>
             </a:pPr>
             <a:r>
-              <a:rPr sz="1600" b="0" i="0">
+              <a:rPr sz="2000" b="0" i="0">
                 <a:solidFill>
                   <a:srgbClr val="333333"/>
                 </a:solidFill>
@@ -5395,7 +5395,7 @@
               <a:t>–   </a:t>
             </a:r>
             <a:r>
-              <a:rPr sz="1600" b="1" i="0">
+              <a:rPr sz="2000" b="1" i="0">
                 <a:solidFill>
                   <a:srgbClr val="333333"/>
                 </a:solidFill>
@@ -5404,7 +5404,7 @@
               <a:t>Exito:</a:t>
             </a:r>
             <a:r>
-              <a:rPr sz="1600" b="0" i="0">
+              <a:rPr sz="2000" b="0" i="0">
                 <a:solidFill>
                   <a:srgbClr val="333333"/>
                 </a:solidFill>
@@ -5420,7 +5420,7 @@
               </a:spcAft>
             </a:pPr>
             <a:r>
-              <a:rPr sz="1600" b="0" i="0">
+              <a:rPr sz="2000" b="0" i="0">
                 <a:solidFill>
                   <a:srgbClr val="333333"/>
                 </a:solidFill>
@@ -5429,7 +5429,7 @@
               <a:t>–   </a:t>
             </a:r>
             <a:r>
-              <a:rPr sz="1600" b="1" i="0">
+              <a:rPr sz="2000" b="1" i="0">
                 <a:solidFill>
                   <a:srgbClr val="333333"/>
                 </a:solidFill>
@@ -5438,7 +5438,7 @@
               <a:t>Exito:</a:t>
             </a:r>
             <a:r>
-              <a:rPr sz="1600" b="0" i="0">
+              <a:rPr sz="2000" b="0" i="0">
                 <a:solidFill>
                   <a:srgbClr val="333333"/>
                 </a:solidFill>
@@ -5454,7 +5454,7 @@
               </a:spcAft>
             </a:pPr>
             <a:r>
-              <a:rPr sz="1600" b="0" i="0">
+              <a:rPr sz="2000" b="0" i="0">
                 <a:solidFill>
                   <a:srgbClr val="333333"/>
                 </a:solidFill>
@@ -5463,7 +5463,7 @@
               <a:t>–   </a:t>
             </a:r>
             <a:r>
-              <a:rPr sz="1600" b="1" i="0">
+              <a:rPr sz="2000" b="1" i="0">
                 <a:solidFill>
                   <a:srgbClr val="333333"/>
                 </a:solidFill>
@@ -5472,7 +5472,7 @@
               <a:t>Entrega en ExamLab (https://uniaj.examlab.workers.dev/)</a:t>
             </a:r>
             <a:r>
-              <a:rPr sz="1600" b="0" i="0">
+              <a:rPr sz="2000" b="0" i="0">
                 <a:solidFill>
                   <a:srgbClr val="333333"/>
                 </a:solidFill>
@@ -6519,7 +6519,7 @@
               </a:spcAft>
             </a:pPr>
             <a:r>
-              <a:rPr sz="1600" b="0" i="0">
+              <a:rPr sz="2000" b="0" i="0">
                 <a:solidFill>
                   <a:srgbClr val="333333"/>
                 </a:solidFill>
@@ -6528,7 +6528,7 @@
               <a:t>–   </a:t>
             </a:r>
             <a:r>
-              <a:rPr sz="1600" b="1" i="0">
+              <a:rPr sz="2000" b="1" i="0">
                 <a:solidFill>
                   <a:srgbClr val="333333"/>
                 </a:solidFill>
@@ -6537,7 +6537,7 @@
               <a:t>Hoy avanzamos VetCare en:</a:t>
             </a:r>
             <a:r>
-              <a:rPr sz="1600" b="0" i="0">
+              <a:rPr sz="2000" b="0" i="0">
                 <a:solidFill>
                   <a:srgbClr val="333333"/>
                 </a:solidFill>
@@ -6553,7 +6553,7 @@
               </a:spcAft>
             </a:pPr>
             <a:r>
-              <a:rPr sz="1600" b="0" i="0">
+              <a:rPr sz="2000" b="0" i="0">
                 <a:solidFill>
                   <a:srgbClr val="333333"/>
                 </a:solidFill>
@@ -6562,7 +6562,7 @@
               <a:t>–   Herramienta: </a:t>
             </a:r>
             <a:r>
-              <a:rPr sz="1600" b="1" i="0">
+              <a:rPr sz="2000" b="1" i="0">
                 <a:solidFill>
                   <a:srgbClr val="333333"/>
                 </a:solidFill>
@@ -6571,7 +6571,7 @@
               <a:t>Google Docs · draw.io</a:t>
             </a:r>
             <a:r>
-              <a:rPr sz="1600" b="0" i="0">
+              <a:rPr sz="2000" b="0" i="0">
                 <a:solidFill>
                   <a:srgbClr val="333333"/>
                 </a:solidFill>
@@ -6580,7 +6580,7 @@
               <a:t> · Bloque </a:t>
             </a:r>
             <a:r>
-              <a:rPr sz="1600" b="1" i="0">
+              <a:rPr sz="2000" b="1" i="0">
                 <a:solidFill>
                   <a:srgbClr val="333333"/>
                 </a:solidFill>
@@ -6596,7 +6596,7 @@
               </a:spcAft>
             </a:pPr>
             <a:r>
-              <a:rPr sz="1600" b="0" i="0">
+              <a:rPr sz="2000" b="0" i="0">
                 <a:solidFill>
                   <a:srgbClr val="333333"/>
                 </a:solidFill>
@@ -6605,7 +6605,7 @@
               <a:t>–   </a:t>
             </a:r>
             <a:r>
-              <a:rPr sz="1600" b="1" i="0">
+              <a:rPr sz="2000" b="1" i="0">
                 <a:solidFill>
                   <a:srgbClr val="333333"/>
                 </a:solidFill>
@@ -6614,7 +6614,7 @@
               <a:t>Entregable de hoy:</a:t>
             </a:r>
             <a:r>
-              <a:rPr sz="1600" b="0" i="0">
+              <a:rPr sz="2000" b="0" i="0">
                 <a:solidFill>
                   <a:srgbClr val="333333"/>
                 </a:solidFill>
@@ -6630,7 +6630,7 @@
               </a:spcAft>
             </a:pPr>
             <a:r>
-              <a:rPr sz="1600" b="0" i="0">
+              <a:rPr sz="2000" b="0" i="0">
                 <a:solidFill>
                   <a:srgbClr val="333333"/>
                 </a:solidFill>
@@ -6954,7 +6954,7 @@
         <p:spPr>
           <a:xfrm>
             <a:off x="502920" y="2587752"/>
-            <a:ext cx="2164019" cy="2560320"/>
+            <a:ext cx="2164019" cy="3310128"/>
           </a:xfrm>
           <a:prstGeom prst="rect">
             <a:avLst/>
@@ -7069,7 +7069,7 @@
         <p:spPr>
           <a:xfrm>
             <a:off x="2758379" y="2587752"/>
-            <a:ext cx="2164019" cy="2560320"/>
+            <a:ext cx="2164019" cy="3310128"/>
           </a:xfrm>
           <a:prstGeom prst="rect">
             <a:avLst/>
@@ -7184,7 +7184,7 @@
         <p:spPr>
           <a:xfrm>
             <a:off x="5013838" y="2587752"/>
-            <a:ext cx="2164019" cy="2560320"/>
+            <a:ext cx="2164019" cy="3310128"/>
           </a:xfrm>
           <a:prstGeom prst="rect">
             <a:avLst/>
@@ -7299,7 +7299,7 @@
         <p:spPr>
           <a:xfrm>
             <a:off x="7269297" y="2587752"/>
-            <a:ext cx="2164019" cy="2560320"/>
+            <a:ext cx="2164019" cy="3310128"/>
           </a:xfrm>
           <a:prstGeom prst="rect">
             <a:avLst/>
@@ -7414,7 +7414,7 @@
         <p:spPr>
           <a:xfrm>
             <a:off x="9524756" y="2587752"/>
-            <a:ext cx="2164019" cy="2560320"/>
+            <a:ext cx="2164019" cy="3310128"/>
           </a:xfrm>
           <a:prstGeom prst="rect">
             <a:avLst/>
@@ -7448,8 +7448,8 @@
         </p:nvSpPr>
         <p:spPr>
           <a:xfrm>
-            <a:off x="457200" y="5943600"/>
-            <a:ext cx="11277295" cy="365760"/>
+            <a:off x="457200" y="5806440"/>
+            <a:ext cx="11277295" cy="640080"/>
           </a:xfrm>
           <a:prstGeom prst="rect">
             <a:avLst/>
@@ -7702,7 +7702,7 @@
               </a:spcAft>
             </a:pPr>
             <a:r>
-              <a:rPr sz="1500" b="0" i="0">
+              <a:rPr sz="2000" b="0" i="0">
                 <a:solidFill>
                   <a:srgbClr val="333333"/>
                 </a:solidFill>
@@ -7718,7 +7718,7 @@
               </a:spcAft>
             </a:pPr>
             <a:r>
-              <a:rPr sz="1500" b="0" i="0">
+              <a:rPr sz="2000" b="0" i="0">
                 <a:solidFill>
                   <a:srgbClr val="333333"/>
                 </a:solidFill>
@@ -7734,7 +7734,7 @@
               </a:spcAft>
             </a:pPr>
             <a:r>
-              <a:rPr sz="1500" b="0" i="0">
+              <a:rPr sz="2000" b="0" i="0">
                 <a:solidFill>
                   <a:srgbClr val="333333"/>
                 </a:solidFill>
@@ -7750,7 +7750,7 @@
               </a:spcAft>
             </a:pPr>
             <a:r>
-              <a:rPr sz="1500" b="0" i="0">
+              <a:rPr sz="2000" b="0" i="0">
                 <a:solidFill>
                   <a:srgbClr val="333333"/>
                 </a:solidFill>
@@ -7766,7 +7766,7 @@
               </a:spcAft>
             </a:pPr>
             <a:r>
-              <a:rPr sz="1500" b="0" i="0">
+              <a:rPr sz="2000" b="0" i="0">
                 <a:solidFill>
                   <a:srgbClr val="333333"/>
                 </a:solidFill>
@@ -8537,7 +8537,7 @@
               </a:spcAft>
             </a:pPr>
             <a:r>
-              <a:rPr sz="1600" b="0" i="0">
+              <a:rPr sz="2000" b="0" i="0">
                 <a:solidFill>
                   <a:srgbClr val="333333"/>
                 </a:solidFill>
@@ -8546,7 +8546,7 @@
               <a:t>–   </a:t>
             </a:r>
             <a:r>
-              <a:rPr sz="1600" b="1" i="0">
+              <a:rPr sz="2000" b="1" i="0">
                 <a:solidFill>
                   <a:srgbClr val="333333"/>
                 </a:solidFill>
@@ -8555,7 +8555,7 @@
               <a:t>Herramienta:</a:t>
             </a:r>
             <a:r>
-              <a:rPr sz="1600" b="0" i="0">
+              <a:rPr sz="2000" b="0" i="0">
                 <a:solidFill>
                   <a:srgbClr val="333333"/>
                 </a:solidFill>
@@ -8571,7 +8571,7 @@
               </a:spcAft>
             </a:pPr>
             <a:r>
-              <a:rPr sz="1600" b="0" i="0">
+              <a:rPr sz="2000" b="0" i="0">
                 <a:solidFill>
                   <a:srgbClr val="333333"/>
                 </a:solidFill>
@@ -8580,7 +8580,7 @@
               <a:t>–   </a:t>
             </a:r>
             <a:r>
-              <a:rPr sz="1600" b="1" i="0">
+              <a:rPr sz="2000" b="1" i="0">
                 <a:solidFill>
                   <a:srgbClr val="333333"/>
                 </a:solidFill>
@@ -8589,7 +8589,7 @@
               <a:t>Demo:</a:t>
             </a:r>
             <a:r>
-              <a:rPr sz="1600" b="0" i="0">
+              <a:rPr sz="2000" b="0" i="0">
                 <a:solidFill>
                   <a:srgbClr val="333333"/>
                 </a:solidFill>
@@ -8605,7 +8605,7 @@
               </a:spcAft>
             </a:pPr>
             <a:r>
-              <a:rPr sz="1600" b="0" i="0">
+              <a:rPr sz="2000" b="0" i="0">
                 <a:solidFill>
                   <a:srgbClr val="333333"/>
                 </a:solidFill>
@@ -9652,7 +9652,7 @@
               </a:spcAft>
             </a:pPr>
             <a:r>
-              <a:rPr sz="1600" b="0" i="0">
+              <a:rPr sz="2000" b="0" i="0">
                 <a:solidFill>
                   <a:srgbClr val="333333"/>
                 </a:solidFill>
@@ -9661,7 +9661,7 @@
               <a:t>–   </a:t>
             </a:r>
             <a:r>
-              <a:rPr sz="1600" b="1" i="0">
+              <a:rPr sz="2000" b="1" i="0">
                 <a:solidFill>
                   <a:srgbClr val="333333"/>
                 </a:solidFill>
@@ -9670,7 +9670,7 @@
               <a:t>Por que importa al PI:</a:t>
             </a:r>
             <a:r>
-              <a:rPr sz="1600" b="0" i="0">
+              <a:rPr sz="2000" b="0" i="0">
                 <a:solidFill>
                   <a:srgbClr val="333333"/>
                 </a:solidFill>
@@ -9686,7 +9686,7 @@
               </a:spcAft>
             </a:pPr>
             <a:r>
-              <a:rPr sz="1600" b="0" i="0">
+              <a:rPr sz="2000" b="0" i="0">
                 <a:solidFill>
                   <a:srgbClr val="333333"/>
                 </a:solidFill>
@@ -9702,7 +9702,7 @@
               </a:spcAft>
             </a:pPr>
             <a:r>
-              <a:rPr sz="1600" b="0" i="0">
+              <a:rPr sz="2000" b="0" i="0">
                 <a:solidFill>
                   <a:srgbClr val="333333"/>
                 </a:solidFill>
@@ -9922,7 +9922,7 @@
               </a:spcAft>
             </a:pPr>
             <a:r>
-              <a:rPr sz="1600" b="0" i="0">
+              <a:rPr sz="2000" b="0" i="0">
                 <a:solidFill>
                   <a:srgbClr val="333333"/>
                 </a:solidFill>
@@ -9938,7 +9938,7 @@
               </a:spcAft>
             </a:pPr>
             <a:r>
-              <a:rPr sz="1600" b="0" i="0">
+              <a:rPr sz="2000" b="0" i="0">
                 <a:solidFill>
                   <a:srgbClr val="333333"/>
                 </a:solidFill>
@@ -9954,7 +9954,7 @@
               </a:spcAft>
             </a:pPr>
             <a:r>
-              <a:rPr sz="1600" b="0" i="0">
+              <a:rPr sz="2000" b="0" i="0">
                 <a:solidFill>
                   <a:srgbClr val="333333"/>
                 </a:solidFill>

--- a/Seminario de Sistemas/Clases/Clase 1 - Conceptos iniciales/Presentacion.pptx
+++ b/Seminario de Sistemas/Clases/Clase 1 - Conceptos iniciales/Presentacion.pptx
@@ -3768,13 +3768,13 @@
           <a:lstStyle/>
           <a:p>
             <a:r>
-              <a:rPr sz="1500" b="1" i="0">
+              <a:rPr sz="1400" b="1" i="0">
                 <a:solidFill>
                   <a:srgbClr val="095292"/>
                 </a:solidFill>
                 <a:latin typeface="Calibri"/>
               </a:rPr>
-              <a:t>Modalidad de trabajo: individual por defecto. Abra su ficha de dominio y escriba su nombre. Si el docente autoriza equipos de 2 o 3 integrantes, la ficha puede ser compartida, pero la entrega en ExamLab siempre es individual y con sus propias palabras.</a:t>
+              <a:t>Modalidad de trabajo: individual por defecto. Abra su ficha de dominio y escriba su nombre. Si el docente autoriza equipos de 2 o 3 integrantes, la ficha puede ser compartida, pero la entrega en la plataforma del curso siempre es individual y con sus propias palabras.</a:t>
             </a:r>
           </a:p>
         </p:txBody>
@@ -5469,7 +5469,7 @@
                 </a:solidFill>
                 <a:latin typeface="Calibri"/>
               </a:rPr>
-              <a:t>Entrega en ExamLab (https://uniaj.examlab.workers.dev/)</a:t>
+              <a:t>Entrega en la plataforma del curso</a:t>
             </a:r>
             <a:r>
               <a:rPr sz="2000" b="0" i="0">
@@ -5478,7 +5478,7 @@
                 </a:solidFill>
                 <a:latin typeface="Calibri"/>
               </a:rPr>
-              <a:t> — domingo 23:59.</a:t>
+              <a:t> — en la fecha que indique el docente.</a:t>
             </a:r>
           </a:p>
         </p:txBody>
@@ -6073,7 +6073,7 @@
                 </a:solidFill>
                 <a:latin typeface="Calibri"/>
               </a:rPr>
-              <a:t>Entrega del taller en ExamLab (https://uniaj.examlab.workers.dev/) · domingo 23:59.</a:t>
+              <a:t>Entrega del taller, si el docente lo asigna · en la fecha que indique el docente.</a:t>
             </a:r>
           </a:p>
         </p:txBody>
@@ -9422,7 +9422,7 @@
                 </a:solidFill>
                 <a:latin typeface="Calibri"/>
               </a:rPr>
-              <a:t>ExamLab</a:t>
+              <a:t>la plataforma del curso</a:t>
             </a:r>
           </a:p>
           <a:p>
@@ -9438,7 +9438,7 @@
                 </a:solidFill>
                 <a:latin typeface="Calibri"/>
               </a:rPr>
-              <a:t>Entrega del taller · domingo 23:59</a:t>
+              <a:t>Entrega del taller · en la fecha que indique el docente</a:t>
             </a:r>
           </a:p>
         </p:txBody>
